--- a/generative-ai/slides/Day03_GenAI.pptx
+++ b/generative-ai/slides/Day03_GenAI.pptx
@@ -396,7 +396,7 @@
             <a:pPr indent="0" algn="r">
               <a:buNone/>
             </a:pPr>
-            <a:fld id="{81B91472-D6C7-46AB-A157-51387D6AB821}" type="slidenum">
+            <a:fld id="{09AAB694-8CBF-45B0-97EB-4C3E71399748}" type="slidenum">
               <a:rPr lang="en-IN" sz="1400" b="0" u="none" strike="noStrike">
                 <a:solidFill>
                   <a:srgbClr val="000000"/>
@@ -443,7 +443,7 @@
       </p:grpSpPr>
       <p:sp>
         <p:nvSpPr>
-          <p:cNvPr id="408" name="PlaceHolder 1"/>
+          <p:cNvPr id="409" name="PlaceHolder 1"/>
           <p:cNvSpPr>
             <a:spLocks noGrp="1"/>
           </p:cNvSpPr>
@@ -466,7 +466,7 @@
       </p:sp>
       <p:sp>
         <p:nvSpPr>
-          <p:cNvPr id="409" name="PlaceHolder 2"/>
+          <p:cNvPr id="410" name="PlaceHolder 2"/>
           <p:cNvSpPr>
             <a:spLocks noGrp="1"/>
           </p:cNvSpPr>
@@ -522,7 +522,7 @@
       </p:sp>
       <p:sp>
         <p:nvSpPr>
-          <p:cNvPr id="410" name="PlaceHolder 3"/>
+          <p:cNvPr id="411" name="PlaceHolder 3"/>
           <p:cNvSpPr>
             <a:spLocks noGrp="1"/>
           </p:cNvSpPr>
@@ -571,7 +571,7 @@
               </a:lnSpc>
               <a:buNone/>
             </a:pPr>
-            <a:fld id="{694B9848-5BED-45CC-AF28-7C3D4DA62447}" type="slidenum">
+            <a:fld id="{9411ED87-3260-471F-B173-B923952E6E48}" type="slidenum">
               <a:rPr lang="en-US" sz="1200" b="0" u="none" strike="noStrike">
                 <a:solidFill>
                   <a:schemeClr val="dk1"/>
@@ -618,7 +618,7 @@
       </p:grpSpPr>
       <p:sp>
         <p:nvSpPr>
-          <p:cNvPr id="435" name="PlaceHolder 1"/>
+          <p:cNvPr id="436" name="PlaceHolder 1"/>
           <p:cNvSpPr>
             <a:spLocks noGrp="1"/>
           </p:cNvSpPr>
@@ -641,7 +641,7 @@
       </p:sp>
       <p:sp>
         <p:nvSpPr>
-          <p:cNvPr id="436" name="PlaceHolder 2"/>
+          <p:cNvPr id="437" name="PlaceHolder 2"/>
           <p:cNvSpPr>
             <a:spLocks noGrp="1"/>
           </p:cNvSpPr>
@@ -697,7 +697,7 @@
       </p:sp>
       <p:sp>
         <p:nvSpPr>
-          <p:cNvPr id="437" name="PlaceHolder 3"/>
+          <p:cNvPr id="438" name="PlaceHolder 3"/>
           <p:cNvSpPr>
             <a:spLocks noGrp="1"/>
           </p:cNvSpPr>
@@ -746,7 +746,7 @@
               </a:lnSpc>
               <a:buNone/>
             </a:pPr>
-            <a:fld id="{CAF615A0-2255-4372-BA38-52BB9A5A0DEB}" type="slidenum">
+            <a:fld id="{9F4BF266-609A-4039-8561-2B36EACBA315}" type="slidenum">
               <a:rPr lang="en-US" sz="1200" b="0" u="none" strike="noStrike">
                 <a:solidFill>
                   <a:schemeClr val="dk1"/>
@@ -793,7 +793,7 @@
       </p:grpSpPr>
       <p:sp>
         <p:nvSpPr>
-          <p:cNvPr id="438" name="PlaceHolder 1"/>
+          <p:cNvPr id="439" name="PlaceHolder 1"/>
           <p:cNvSpPr>
             <a:spLocks noGrp="1"/>
           </p:cNvSpPr>
@@ -816,7 +816,7 @@
       </p:sp>
       <p:sp>
         <p:nvSpPr>
-          <p:cNvPr id="439" name="PlaceHolder 2"/>
+          <p:cNvPr id="440" name="PlaceHolder 2"/>
           <p:cNvSpPr>
             <a:spLocks noGrp="1"/>
           </p:cNvSpPr>
@@ -872,7 +872,7 @@
       </p:sp>
       <p:sp>
         <p:nvSpPr>
-          <p:cNvPr id="440" name="PlaceHolder 3"/>
+          <p:cNvPr id="441" name="PlaceHolder 3"/>
           <p:cNvSpPr>
             <a:spLocks noGrp="1"/>
           </p:cNvSpPr>
@@ -921,7 +921,7 @@
               </a:lnSpc>
               <a:buNone/>
             </a:pPr>
-            <a:fld id="{D10D6F2C-E877-41CC-8939-C609F9714C96}" type="slidenum">
+            <a:fld id="{F888C3B7-84D3-4B9D-A1A1-F6A8763B5A33}" type="slidenum">
               <a:rPr lang="en-US" sz="1200" b="0" u="none" strike="noStrike">
                 <a:solidFill>
                   <a:schemeClr val="dk1"/>
@@ -968,7 +968,7 @@
       </p:grpSpPr>
       <p:sp>
         <p:nvSpPr>
-          <p:cNvPr id="441" name="PlaceHolder 1"/>
+          <p:cNvPr id="442" name="PlaceHolder 1"/>
           <p:cNvSpPr>
             <a:spLocks noGrp="1"/>
           </p:cNvSpPr>
@@ -991,7 +991,7 @@
       </p:sp>
       <p:sp>
         <p:nvSpPr>
-          <p:cNvPr id="442" name="PlaceHolder 2"/>
+          <p:cNvPr id="443" name="PlaceHolder 2"/>
           <p:cNvSpPr>
             <a:spLocks noGrp="1"/>
           </p:cNvSpPr>
@@ -1047,7 +1047,7 @@
       </p:sp>
       <p:sp>
         <p:nvSpPr>
-          <p:cNvPr id="443" name="PlaceHolder 3"/>
+          <p:cNvPr id="444" name="PlaceHolder 3"/>
           <p:cNvSpPr>
             <a:spLocks noGrp="1"/>
           </p:cNvSpPr>
@@ -1096,7 +1096,7 @@
               </a:lnSpc>
               <a:buNone/>
             </a:pPr>
-            <a:fld id="{E92657B1-E8DB-4FC1-8D6C-B0783F66AC9E}" type="slidenum">
+            <a:fld id="{CC28B867-5CE7-4707-BDF2-B5A2722F0EA7}" type="slidenum">
               <a:rPr lang="en-US" sz="1200" b="0" u="none" strike="noStrike">
                 <a:solidFill>
                   <a:schemeClr val="dk1"/>
@@ -1143,7 +1143,7 @@
       </p:grpSpPr>
       <p:sp>
         <p:nvSpPr>
-          <p:cNvPr id="444" name="PlaceHolder 1"/>
+          <p:cNvPr id="445" name="PlaceHolder 1"/>
           <p:cNvSpPr>
             <a:spLocks noGrp="1"/>
           </p:cNvSpPr>
@@ -1166,7 +1166,7 @@
       </p:sp>
       <p:sp>
         <p:nvSpPr>
-          <p:cNvPr id="445" name="PlaceHolder 2"/>
+          <p:cNvPr id="446" name="PlaceHolder 2"/>
           <p:cNvSpPr>
             <a:spLocks noGrp="1"/>
           </p:cNvSpPr>
@@ -1222,7 +1222,7 @@
       </p:sp>
       <p:sp>
         <p:nvSpPr>
-          <p:cNvPr id="446" name="PlaceHolder 3"/>
+          <p:cNvPr id="447" name="PlaceHolder 3"/>
           <p:cNvSpPr>
             <a:spLocks noGrp="1"/>
           </p:cNvSpPr>
@@ -1271,7 +1271,7 @@
               </a:lnSpc>
               <a:buNone/>
             </a:pPr>
-            <a:fld id="{606A0AE0-36EE-4FED-BACC-1B8153426AAD}" type="slidenum">
+            <a:fld id="{108CD204-A57C-4338-BCBF-6C50EB91A86A}" type="slidenum">
               <a:rPr lang="en-US" sz="1200" b="0" u="none" strike="noStrike">
                 <a:solidFill>
                   <a:schemeClr val="dk1"/>
@@ -1318,7 +1318,7 @@
       </p:grpSpPr>
       <p:sp>
         <p:nvSpPr>
-          <p:cNvPr id="447" name="PlaceHolder 1"/>
+          <p:cNvPr id="448" name="PlaceHolder 1"/>
           <p:cNvSpPr>
             <a:spLocks noGrp="1"/>
           </p:cNvSpPr>
@@ -1341,7 +1341,7 @@
       </p:sp>
       <p:sp>
         <p:nvSpPr>
-          <p:cNvPr id="448" name="PlaceHolder 2"/>
+          <p:cNvPr id="449" name="PlaceHolder 2"/>
           <p:cNvSpPr>
             <a:spLocks noGrp="1"/>
           </p:cNvSpPr>
@@ -1397,7 +1397,7 @@
       </p:sp>
       <p:sp>
         <p:nvSpPr>
-          <p:cNvPr id="449" name="PlaceHolder 3"/>
+          <p:cNvPr id="450" name="PlaceHolder 3"/>
           <p:cNvSpPr>
             <a:spLocks noGrp="1"/>
           </p:cNvSpPr>
@@ -1446,7 +1446,7 @@
               </a:lnSpc>
               <a:buNone/>
             </a:pPr>
-            <a:fld id="{ED650BDD-AC2C-459D-A828-34AE98B18CC0}" type="slidenum">
+            <a:fld id="{A6BBB220-919D-40B5-A2C6-37BA3FE9882C}" type="slidenum">
               <a:rPr lang="en-US" sz="1200" b="0" u="none" strike="noStrike">
                 <a:solidFill>
                   <a:schemeClr val="dk1"/>
@@ -1493,7 +1493,7 @@
       </p:grpSpPr>
       <p:sp>
         <p:nvSpPr>
-          <p:cNvPr id="450" name="PlaceHolder 1"/>
+          <p:cNvPr id="451" name="PlaceHolder 1"/>
           <p:cNvSpPr>
             <a:spLocks noGrp="1"/>
           </p:cNvSpPr>
@@ -1516,7 +1516,7 @@
       </p:sp>
       <p:sp>
         <p:nvSpPr>
-          <p:cNvPr id="451" name="PlaceHolder 2"/>
+          <p:cNvPr id="452" name="PlaceHolder 2"/>
           <p:cNvSpPr>
             <a:spLocks noGrp="1"/>
           </p:cNvSpPr>
@@ -1572,7 +1572,7 @@
       </p:sp>
       <p:sp>
         <p:nvSpPr>
-          <p:cNvPr id="452" name="PlaceHolder 3"/>
+          <p:cNvPr id="453" name="PlaceHolder 3"/>
           <p:cNvSpPr>
             <a:spLocks noGrp="1"/>
           </p:cNvSpPr>
@@ -1621,7 +1621,7 @@
               </a:lnSpc>
               <a:buNone/>
             </a:pPr>
-            <a:fld id="{FBD0846B-717B-41BE-9837-618B7545B08B}" type="slidenum">
+            <a:fld id="{7DD1A650-628E-404B-83C6-8E8FB7374140}" type="slidenum">
               <a:rPr lang="en-US" sz="1200" b="0" u="none" strike="noStrike">
                 <a:solidFill>
                   <a:schemeClr val="dk1"/>
@@ -1668,7 +1668,7 @@
       </p:grpSpPr>
       <p:sp>
         <p:nvSpPr>
-          <p:cNvPr id="453" name="PlaceHolder 1"/>
+          <p:cNvPr id="454" name="PlaceHolder 1"/>
           <p:cNvSpPr>
             <a:spLocks noGrp="1"/>
           </p:cNvSpPr>
@@ -1691,7 +1691,7 @@
       </p:sp>
       <p:sp>
         <p:nvSpPr>
-          <p:cNvPr id="454" name="PlaceHolder 2"/>
+          <p:cNvPr id="455" name="PlaceHolder 2"/>
           <p:cNvSpPr>
             <a:spLocks noGrp="1"/>
           </p:cNvSpPr>
@@ -1747,7 +1747,7 @@
       </p:sp>
       <p:sp>
         <p:nvSpPr>
-          <p:cNvPr id="455" name="PlaceHolder 3"/>
+          <p:cNvPr id="456" name="PlaceHolder 3"/>
           <p:cNvSpPr>
             <a:spLocks noGrp="1"/>
           </p:cNvSpPr>
@@ -1796,7 +1796,7 @@
               </a:lnSpc>
               <a:buNone/>
             </a:pPr>
-            <a:fld id="{AE3790A8-E8B1-460A-9035-97A5A0C15062}" type="slidenum">
+            <a:fld id="{C63E2BC7-166A-4C88-A809-B8C7BDD9A403}" type="slidenum">
               <a:rPr lang="en-US" sz="1200" b="0" u="none" strike="noStrike">
                 <a:solidFill>
                   <a:schemeClr val="dk1"/>
@@ -1843,7 +1843,7 @@
       </p:grpSpPr>
       <p:sp>
         <p:nvSpPr>
-          <p:cNvPr id="456" name="PlaceHolder 1"/>
+          <p:cNvPr id="457" name="PlaceHolder 1"/>
           <p:cNvSpPr>
             <a:spLocks noGrp="1"/>
           </p:cNvSpPr>
@@ -1866,7 +1866,7 @@
       </p:sp>
       <p:sp>
         <p:nvSpPr>
-          <p:cNvPr id="457" name="PlaceHolder 2"/>
+          <p:cNvPr id="458" name="PlaceHolder 2"/>
           <p:cNvSpPr>
             <a:spLocks noGrp="1"/>
           </p:cNvSpPr>
@@ -1922,7 +1922,7 @@
       </p:sp>
       <p:sp>
         <p:nvSpPr>
-          <p:cNvPr id="458" name="PlaceHolder 3"/>
+          <p:cNvPr id="459" name="PlaceHolder 3"/>
           <p:cNvSpPr>
             <a:spLocks noGrp="1"/>
           </p:cNvSpPr>
@@ -1971,7 +1971,7 @@
               </a:lnSpc>
               <a:buNone/>
             </a:pPr>
-            <a:fld id="{B7105889-3888-4E24-B6E2-AB82B6A989F6}" type="slidenum">
+            <a:fld id="{AAE43B75-51F5-4598-B4DC-B859D125A709}" type="slidenum">
               <a:rPr lang="en-US" sz="1200" b="0" u="none" strike="noStrike">
                 <a:solidFill>
                   <a:schemeClr val="dk1"/>
@@ -2018,7 +2018,7 @@
       </p:grpSpPr>
       <p:sp>
         <p:nvSpPr>
-          <p:cNvPr id="459" name="PlaceHolder 1"/>
+          <p:cNvPr id="460" name="PlaceHolder 1"/>
           <p:cNvSpPr>
             <a:spLocks noGrp="1"/>
           </p:cNvSpPr>
@@ -2041,7 +2041,7 @@
       </p:sp>
       <p:sp>
         <p:nvSpPr>
-          <p:cNvPr id="460" name="PlaceHolder 2"/>
+          <p:cNvPr id="461" name="PlaceHolder 2"/>
           <p:cNvSpPr>
             <a:spLocks noGrp="1"/>
           </p:cNvSpPr>
@@ -2097,7 +2097,7 @@
       </p:sp>
       <p:sp>
         <p:nvSpPr>
-          <p:cNvPr id="461" name="PlaceHolder 3"/>
+          <p:cNvPr id="462" name="PlaceHolder 3"/>
           <p:cNvSpPr>
             <a:spLocks noGrp="1"/>
           </p:cNvSpPr>
@@ -2146,7 +2146,7 @@
               </a:lnSpc>
               <a:buNone/>
             </a:pPr>
-            <a:fld id="{42F495AC-400B-4B9D-9B67-D0FB801435D1}" type="slidenum">
+            <a:fld id="{D2EF8B1B-53D1-4841-86AD-2E22701103FC}" type="slidenum">
               <a:rPr lang="en-US" sz="1200" b="0" u="none" strike="noStrike">
                 <a:solidFill>
                   <a:schemeClr val="dk1"/>
@@ -2193,7 +2193,7 @@
       </p:grpSpPr>
       <p:sp>
         <p:nvSpPr>
-          <p:cNvPr id="462" name="PlaceHolder 1"/>
+          <p:cNvPr id="463" name="PlaceHolder 1"/>
           <p:cNvSpPr>
             <a:spLocks noGrp="1"/>
           </p:cNvSpPr>
@@ -2216,7 +2216,7 @@
       </p:sp>
       <p:sp>
         <p:nvSpPr>
-          <p:cNvPr id="463" name="PlaceHolder 2"/>
+          <p:cNvPr id="464" name="PlaceHolder 2"/>
           <p:cNvSpPr>
             <a:spLocks noGrp="1"/>
           </p:cNvSpPr>
@@ -2272,7 +2272,7 @@
       </p:sp>
       <p:sp>
         <p:nvSpPr>
-          <p:cNvPr id="464" name="PlaceHolder 3"/>
+          <p:cNvPr id="465" name="PlaceHolder 3"/>
           <p:cNvSpPr>
             <a:spLocks noGrp="1"/>
           </p:cNvSpPr>
@@ -2321,7 +2321,7 @@
               </a:lnSpc>
               <a:buNone/>
             </a:pPr>
-            <a:fld id="{B2632E76-C4AD-45B2-8247-B96BDABA49B2}" type="slidenum">
+            <a:fld id="{6DCCCD8F-41E8-409B-9E18-C93BCDDB7619}" type="slidenum">
               <a:rPr lang="en-US" sz="1200" b="0" u="none" strike="noStrike">
                 <a:solidFill>
                   <a:schemeClr val="dk1"/>
@@ -2368,7 +2368,7 @@
       </p:grpSpPr>
       <p:sp>
         <p:nvSpPr>
-          <p:cNvPr id="411" name="PlaceHolder 1"/>
+          <p:cNvPr id="412" name="PlaceHolder 1"/>
           <p:cNvSpPr>
             <a:spLocks noGrp="1"/>
           </p:cNvSpPr>
@@ -2391,7 +2391,7 @@
       </p:sp>
       <p:sp>
         <p:nvSpPr>
-          <p:cNvPr id="412" name="PlaceHolder 2"/>
+          <p:cNvPr id="413" name="PlaceHolder 2"/>
           <p:cNvSpPr>
             <a:spLocks noGrp="1"/>
           </p:cNvSpPr>
@@ -2447,7 +2447,7 @@
       </p:sp>
       <p:sp>
         <p:nvSpPr>
-          <p:cNvPr id="413" name="PlaceHolder 3"/>
+          <p:cNvPr id="414" name="PlaceHolder 3"/>
           <p:cNvSpPr>
             <a:spLocks noGrp="1"/>
           </p:cNvSpPr>
@@ -2496,7 +2496,7 @@
               </a:lnSpc>
               <a:buNone/>
             </a:pPr>
-            <a:fld id="{49A2D4DD-F31E-4231-B336-7FCD63D01F3A}" type="slidenum">
+            <a:fld id="{4AD47FEF-0CF4-4E37-80F7-ADC6B1D92309}" type="slidenum">
               <a:rPr lang="en-US" sz="1200" b="0" u="none" strike="noStrike">
                 <a:solidFill>
                   <a:schemeClr val="dk1"/>
@@ -2543,7 +2543,7 @@
       </p:grpSpPr>
       <p:sp>
         <p:nvSpPr>
-          <p:cNvPr id="465" name="PlaceHolder 1"/>
+          <p:cNvPr id="466" name="PlaceHolder 1"/>
           <p:cNvSpPr>
             <a:spLocks noGrp="1"/>
           </p:cNvSpPr>
@@ -2566,7 +2566,7 @@
       </p:sp>
       <p:sp>
         <p:nvSpPr>
-          <p:cNvPr id="466" name="PlaceHolder 2"/>
+          <p:cNvPr id="467" name="PlaceHolder 2"/>
           <p:cNvSpPr>
             <a:spLocks noGrp="1"/>
           </p:cNvSpPr>
@@ -2622,7 +2622,7 @@
       </p:sp>
       <p:sp>
         <p:nvSpPr>
-          <p:cNvPr id="467" name="PlaceHolder 3"/>
+          <p:cNvPr id="468" name="PlaceHolder 3"/>
           <p:cNvSpPr>
             <a:spLocks noGrp="1"/>
           </p:cNvSpPr>
@@ -2671,7 +2671,7 @@
               </a:lnSpc>
               <a:buNone/>
             </a:pPr>
-            <a:fld id="{69D80B1E-1220-465A-B5DF-0C17697B24DC}" type="slidenum">
+            <a:fld id="{22906FC7-0A6A-41F5-99B6-883F0D05CD30}" type="slidenum">
               <a:rPr lang="en-US" sz="1200" b="0" u="none" strike="noStrike">
                 <a:solidFill>
                   <a:schemeClr val="dk1"/>
@@ -2718,7 +2718,7 @@
       </p:grpSpPr>
       <p:sp>
         <p:nvSpPr>
-          <p:cNvPr id="468" name="PlaceHolder 1"/>
+          <p:cNvPr id="469" name="PlaceHolder 1"/>
           <p:cNvSpPr>
             <a:spLocks noGrp="1"/>
           </p:cNvSpPr>
@@ -2741,7 +2741,7 @@
       </p:sp>
       <p:sp>
         <p:nvSpPr>
-          <p:cNvPr id="469" name="PlaceHolder 2"/>
+          <p:cNvPr id="470" name="PlaceHolder 2"/>
           <p:cNvSpPr>
             <a:spLocks noGrp="1"/>
           </p:cNvSpPr>
@@ -2797,7 +2797,7 @@
       </p:sp>
       <p:sp>
         <p:nvSpPr>
-          <p:cNvPr id="470" name="PlaceHolder 3"/>
+          <p:cNvPr id="471" name="PlaceHolder 3"/>
           <p:cNvSpPr>
             <a:spLocks noGrp="1"/>
           </p:cNvSpPr>
@@ -2846,7 +2846,7 @@
               </a:lnSpc>
               <a:buNone/>
             </a:pPr>
-            <a:fld id="{8AB6F493-D24F-4E54-9B6A-DD6DEAB096A7}" type="slidenum">
+            <a:fld id="{353A50B5-3EE4-4731-A3EC-CB4F58C97F39}" type="slidenum">
               <a:rPr lang="en-US" sz="1200" b="0" u="none" strike="noStrike">
                 <a:solidFill>
                   <a:schemeClr val="dk1"/>
@@ -2893,7 +2893,7 @@
       </p:grpSpPr>
       <p:sp>
         <p:nvSpPr>
-          <p:cNvPr id="471" name="PlaceHolder 1"/>
+          <p:cNvPr id="472" name="PlaceHolder 1"/>
           <p:cNvSpPr>
             <a:spLocks noGrp="1"/>
           </p:cNvSpPr>
@@ -2916,7 +2916,7 @@
       </p:sp>
       <p:sp>
         <p:nvSpPr>
-          <p:cNvPr id="472" name="PlaceHolder 2"/>
+          <p:cNvPr id="473" name="PlaceHolder 2"/>
           <p:cNvSpPr>
             <a:spLocks noGrp="1"/>
           </p:cNvSpPr>
@@ -2972,7 +2972,7 @@
       </p:sp>
       <p:sp>
         <p:nvSpPr>
-          <p:cNvPr id="473" name="PlaceHolder 3"/>
+          <p:cNvPr id="474" name="PlaceHolder 3"/>
           <p:cNvSpPr>
             <a:spLocks noGrp="1"/>
           </p:cNvSpPr>
@@ -3021,7 +3021,7 @@
               </a:lnSpc>
               <a:buNone/>
             </a:pPr>
-            <a:fld id="{72EFF913-64B9-477D-8694-E3AA787EC3D7}" type="slidenum">
+            <a:fld id="{E81E4D85-AEA6-44D1-9A0F-383399272B8A}" type="slidenum">
               <a:rPr lang="en-US" sz="1200" b="0" u="none" strike="noStrike">
                 <a:solidFill>
                   <a:schemeClr val="dk1"/>
@@ -3068,7 +3068,7 @@
       </p:grpSpPr>
       <p:sp>
         <p:nvSpPr>
-          <p:cNvPr id="474" name="PlaceHolder 1"/>
+          <p:cNvPr id="475" name="PlaceHolder 1"/>
           <p:cNvSpPr>
             <a:spLocks noGrp="1"/>
           </p:cNvSpPr>
@@ -3091,7 +3091,7 @@
       </p:sp>
       <p:sp>
         <p:nvSpPr>
-          <p:cNvPr id="475" name="PlaceHolder 2"/>
+          <p:cNvPr id="476" name="PlaceHolder 2"/>
           <p:cNvSpPr>
             <a:spLocks noGrp="1"/>
           </p:cNvSpPr>
@@ -3147,7 +3147,7 @@
       </p:sp>
       <p:sp>
         <p:nvSpPr>
-          <p:cNvPr id="476" name="PlaceHolder 3"/>
+          <p:cNvPr id="477" name="PlaceHolder 3"/>
           <p:cNvSpPr>
             <a:spLocks noGrp="1"/>
           </p:cNvSpPr>
@@ -3196,7 +3196,7 @@
               </a:lnSpc>
               <a:buNone/>
             </a:pPr>
-            <a:fld id="{F9EAE693-9C03-42FA-8EEE-D46BCA08E402}" type="slidenum">
+            <a:fld id="{71A3BFB3-61C3-4594-92C5-BDE4DE5EE241}" type="slidenum">
               <a:rPr lang="en-US" sz="1200" b="0" u="none" strike="noStrike">
                 <a:solidFill>
                   <a:schemeClr val="dk1"/>
@@ -3243,7 +3243,7 @@
       </p:grpSpPr>
       <p:sp>
         <p:nvSpPr>
-          <p:cNvPr id="477" name="PlaceHolder 1"/>
+          <p:cNvPr id="478" name="PlaceHolder 1"/>
           <p:cNvSpPr>
             <a:spLocks noGrp="1"/>
           </p:cNvSpPr>
@@ -3266,7 +3266,7 @@
       </p:sp>
       <p:sp>
         <p:nvSpPr>
-          <p:cNvPr id="478" name="PlaceHolder 2"/>
+          <p:cNvPr id="479" name="PlaceHolder 2"/>
           <p:cNvSpPr>
             <a:spLocks noGrp="1"/>
           </p:cNvSpPr>
@@ -3322,7 +3322,7 @@
       </p:sp>
       <p:sp>
         <p:nvSpPr>
-          <p:cNvPr id="479" name="PlaceHolder 3"/>
+          <p:cNvPr id="480" name="PlaceHolder 3"/>
           <p:cNvSpPr>
             <a:spLocks noGrp="1"/>
           </p:cNvSpPr>
@@ -3371,7 +3371,7 @@
               </a:lnSpc>
               <a:buNone/>
             </a:pPr>
-            <a:fld id="{0A6739C5-84B5-4860-8FE1-2E92962FCF4D}" type="slidenum">
+            <a:fld id="{C0846183-557A-4274-81D7-C47FEA2427B3}" type="slidenum">
               <a:rPr lang="en-US" sz="1200" b="0" u="none" strike="noStrike">
                 <a:solidFill>
                   <a:schemeClr val="dk1"/>
@@ -3418,7 +3418,7 @@
       </p:grpSpPr>
       <p:sp>
         <p:nvSpPr>
-          <p:cNvPr id="480" name="PlaceHolder 1"/>
+          <p:cNvPr id="481" name="PlaceHolder 1"/>
           <p:cNvSpPr>
             <a:spLocks noGrp="1"/>
           </p:cNvSpPr>
@@ -3441,7 +3441,7 @@
       </p:sp>
       <p:sp>
         <p:nvSpPr>
-          <p:cNvPr id="481" name="PlaceHolder 2"/>
+          <p:cNvPr id="482" name="PlaceHolder 2"/>
           <p:cNvSpPr>
             <a:spLocks noGrp="1"/>
           </p:cNvSpPr>
@@ -3497,7 +3497,7 @@
       </p:sp>
       <p:sp>
         <p:nvSpPr>
-          <p:cNvPr id="482" name="PlaceHolder 3"/>
+          <p:cNvPr id="483" name="PlaceHolder 3"/>
           <p:cNvSpPr>
             <a:spLocks noGrp="1"/>
           </p:cNvSpPr>
@@ -3546,7 +3546,7 @@
               </a:lnSpc>
               <a:buNone/>
             </a:pPr>
-            <a:fld id="{E56FE458-A4F8-4961-BFFF-3282A268A774}" type="slidenum">
+            <a:fld id="{EBDC4B3E-6B7F-4A04-B711-510C28529604}" type="slidenum">
               <a:rPr lang="en-US" sz="1200" b="0" u="none" strike="noStrike">
                 <a:solidFill>
                   <a:schemeClr val="dk1"/>
@@ -3593,7 +3593,7 @@
       </p:grpSpPr>
       <p:sp>
         <p:nvSpPr>
-          <p:cNvPr id="483" name="PlaceHolder 1"/>
+          <p:cNvPr id="484" name="PlaceHolder 1"/>
           <p:cNvSpPr>
             <a:spLocks noGrp="1"/>
           </p:cNvSpPr>
@@ -3616,7 +3616,7 @@
       </p:sp>
       <p:sp>
         <p:nvSpPr>
-          <p:cNvPr id="484" name="PlaceHolder 2"/>
+          <p:cNvPr id="485" name="PlaceHolder 2"/>
           <p:cNvSpPr>
             <a:spLocks noGrp="1"/>
           </p:cNvSpPr>
@@ -3672,7 +3672,7 @@
       </p:sp>
       <p:sp>
         <p:nvSpPr>
-          <p:cNvPr id="485" name="PlaceHolder 3"/>
+          <p:cNvPr id="486" name="PlaceHolder 3"/>
           <p:cNvSpPr>
             <a:spLocks noGrp="1"/>
           </p:cNvSpPr>
@@ -3721,7 +3721,7 @@
               </a:lnSpc>
               <a:buNone/>
             </a:pPr>
-            <a:fld id="{8D137373-5074-4C51-A86A-223A73C5F885}" type="slidenum">
+            <a:fld id="{93A7474D-5ADA-471C-B7AD-E0117434FAB3}" type="slidenum">
               <a:rPr lang="en-US" sz="1200" b="0" u="none" strike="noStrike">
                 <a:solidFill>
                   <a:schemeClr val="dk1"/>
@@ -3768,7 +3768,7 @@
       </p:grpSpPr>
       <p:sp>
         <p:nvSpPr>
-          <p:cNvPr id="486" name="PlaceHolder 1"/>
+          <p:cNvPr id="487" name="PlaceHolder 1"/>
           <p:cNvSpPr>
             <a:spLocks noGrp="1"/>
           </p:cNvSpPr>
@@ -3791,7 +3791,7 @@
       </p:sp>
       <p:sp>
         <p:nvSpPr>
-          <p:cNvPr id="487" name="PlaceHolder 2"/>
+          <p:cNvPr id="488" name="PlaceHolder 2"/>
           <p:cNvSpPr>
             <a:spLocks noGrp="1"/>
           </p:cNvSpPr>
@@ -3847,7 +3847,7 @@
       </p:sp>
       <p:sp>
         <p:nvSpPr>
-          <p:cNvPr id="488" name="PlaceHolder 3"/>
+          <p:cNvPr id="489" name="PlaceHolder 3"/>
           <p:cNvSpPr>
             <a:spLocks noGrp="1"/>
           </p:cNvSpPr>
@@ -3896,7 +3896,7 @@
               </a:lnSpc>
               <a:buNone/>
             </a:pPr>
-            <a:fld id="{F93FC91F-4D1A-48A0-8F66-DA41E49E4A4D}" type="slidenum">
+            <a:fld id="{E8240696-36D4-4D90-AE5D-1E31C485D2C0}" type="slidenum">
               <a:rPr lang="en-US" sz="1200" b="0" u="none" strike="noStrike">
                 <a:solidFill>
                   <a:schemeClr val="dk1"/>
@@ -3943,7 +3943,7 @@
       </p:grpSpPr>
       <p:sp>
         <p:nvSpPr>
-          <p:cNvPr id="489" name="PlaceHolder 1"/>
+          <p:cNvPr id="490" name="PlaceHolder 1"/>
           <p:cNvSpPr>
             <a:spLocks noGrp="1"/>
           </p:cNvSpPr>
@@ -3966,7 +3966,7 @@
       </p:sp>
       <p:sp>
         <p:nvSpPr>
-          <p:cNvPr id="490" name="PlaceHolder 2"/>
+          <p:cNvPr id="491" name="PlaceHolder 2"/>
           <p:cNvSpPr>
             <a:spLocks noGrp="1"/>
           </p:cNvSpPr>
@@ -4022,7 +4022,7 @@
       </p:sp>
       <p:sp>
         <p:nvSpPr>
-          <p:cNvPr id="491" name="PlaceHolder 3"/>
+          <p:cNvPr id="492" name="PlaceHolder 3"/>
           <p:cNvSpPr>
             <a:spLocks noGrp="1"/>
           </p:cNvSpPr>
@@ -4071,7 +4071,7 @@
               </a:lnSpc>
               <a:buNone/>
             </a:pPr>
-            <a:fld id="{9738CA35-05AA-4262-88C2-2DC1C57C3299}" type="slidenum">
+            <a:fld id="{6360255B-1B73-4834-9FB3-0EFCFBF68764}" type="slidenum">
               <a:rPr lang="en-US" sz="1200" b="0" u="none" strike="noStrike">
                 <a:solidFill>
                   <a:schemeClr val="dk1"/>
@@ -4118,7 +4118,7 @@
       </p:grpSpPr>
       <p:sp>
         <p:nvSpPr>
-          <p:cNvPr id="492" name="PlaceHolder 1"/>
+          <p:cNvPr id="493" name="PlaceHolder 1"/>
           <p:cNvSpPr>
             <a:spLocks noGrp="1"/>
           </p:cNvSpPr>
@@ -4141,7 +4141,7 @@
       </p:sp>
       <p:sp>
         <p:nvSpPr>
-          <p:cNvPr id="493" name="PlaceHolder 2"/>
+          <p:cNvPr id="494" name="PlaceHolder 2"/>
           <p:cNvSpPr>
             <a:spLocks noGrp="1"/>
           </p:cNvSpPr>
@@ -4197,7 +4197,7 @@
       </p:sp>
       <p:sp>
         <p:nvSpPr>
-          <p:cNvPr id="494" name="PlaceHolder 3"/>
+          <p:cNvPr id="495" name="PlaceHolder 3"/>
           <p:cNvSpPr>
             <a:spLocks noGrp="1"/>
           </p:cNvSpPr>
@@ -4246,7 +4246,7 @@
               </a:lnSpc>
               <a:buNone/>
             </a:pPr>
-            <a:fld id="{A0531AF8-05F0-4F9C-8A36-287C6BB16DC2}" type="slidenum">
+            <a:fld id="{452E8221-F7EB-4484-9FA3-31841AB93F71}" type="slidenum">
               <a:rPr lang="en-US" sz="1200" b="0" u="none" strike="noStrike">
                 <a:solidFill>
                   <a:schemeClr val="dk1"/>
@@ -4293,7 +4293,7 @@
       </p:grpSpPr>
       <p:sp>
         <p:nvSpPr>
-          <p:cNvPr id="414" name="PlaceHolder 1"/>
+          <p:cNvPr id="415" name="PlaceHolder 1"/>
           <p:cNvSpPr>
             <a:spLocks noGrp="1"/>
           </p:cNvSpPr>
@@ -4316,7 +4316,7 @@
       </p:sp>
       <p:sp>
         <p:nvSpPr>
-          <p:cNvPr id="415" name="PlaceHolder 2"/>
+          <p:cNvPr id="416" name="PlaceHolder 2"/>
           <p:cNvSpPr>
             <a:spLocks noGrp="1"/>
           </p:cNvSpPr>
@@ -4372,7 +4372,7 @@
       </p:sp>
       <p:sp>
         <p:nvSpPr>
-          <p:cNvPr id="416" name="PlaceHolder 3"/>
+          <p:cNvPr id="417" name="PlaceHolder 3"/>
           <p:cNvSpPr>
             <a:spLocks noGrp="1"/>
           </p:cNvSpPr>
@@ -4421,7 +4421,7 @@
               </a:lnSpc>
               <a:buNone/>
             </a:pPr>
-            <a:fld id="{7AC8F6FD-6549-4443-8807-D8A4C397B4F7}" type="slidenum">
+            <a:fld id="{499A6035-5F41-4004-9145-388FD8A817BE}" type="slidenum">
               <a:rPr lang="en-US" sz="1200" b="0" u="none" strike="noStrike">
                 <a:solidFill>
                   <a:schemeClr val="dk1"/>
@@ -4468,7 +4468,7 @@
       </p:grpSpPr>
       <p:sp>
         <p:nvSpPr>
-          <p:cNvPr id="495" name="PlaceHolder 1"/>
+          <p:cNvPr id="496" name="PlaceHolder 1"/>
           <p:cNvSpPr>
             <a:spLocks noGrp="1"/>
           </p:cNvSpPr>
@@ -4491,7 +4491,7 @@
       </p:sp>
       <p:sp>
         <p:nvSpPr>
-          <p:cNvPr id="496" name="PlaceHolder 2"/>
+          <p:cNvPr id="497" name="PlaceHolder 2"/>
           <p:cNvSpPr>
             <a:spLocks noGrp="1"/>
           </p:cNvSpPr>
@@ -4547,7 +4547,7 @@
       </p:sp>
       <p:sp>
         <p:nvSpPr>
-          <p:cNvPr id="497" name="PlaceHolder 3"/>
+          <p:cNvPr id="498" name="PlaceHolder 3"/>
           <p:cNvSpPr>
             <a:spLocks noGrp="1"/>
           </p:cNvSpPr>
@@ -4596,7 +4596,7 @@
               </a:lnSpc>
               <a:buNone/>
             </a:pPr>
-            <a:fld id="{616D5BDC-AAD6-4D0B-B25D-0ACFFC9831D3}" type="slidenum">
+            <a:fld id="{03ACB043-EBB9-4804-929A-9DC00C2BD65D}" type="slidenum">
               <a:rPr lang="en-US" sz="1200" b="0" u="none" strike="noStrike">
                 <a:solidFill>
                   <a:schemeClr val="dk1"/>
@@ -4643,7 +4643,7 @@
       </p:grpSpPr>
       <p:sp>
         <p:nvSpPr>
-          <p:cNvPr id="498" name="PlaceHolder 1"/>
+          <p:cNvPr id="499" name="PlaceHolder 1"/>
           <p:cNvSpPr>
             <a:spLocks noGrp="1"/>
           </p:cNvSpPr>
@@ -4666,7 +4666,7 @@
       </p:sp>
       <p:sp>
         <p:nvSpPr>
-          <p:cNvPr id="499" name="PlaceHolder 2"/>
+          <p:cNvPr id="500" name="PlaceHolder 2"/>
           <p:cNvSpPr>
             <a:spLocks noGrp="1"/>
           </p:cNvSpPr>
@@ -4722,7 +4722,7 @@
       </p:sp>
       <p:sp>
         <p:nvSpPr>
-          <p:cNvPr id="500" name="PlaceHolder 3"/>
+          <p:cNvPr id="501" name="PlaceHolder 3"/>
           <p:cNvSpPr>
             <a:spLocks noGrp="1"/>
           </p:cNvSpPr>
@@ -4771,7 +4771,7 @@
               </a:lnSpc>
               <a:buNone/>
             </a:pPr>
-            <a:fld id="{1C67FB86-CA85-4E3E-85EA-EC41B281CC4E}" type="slidenum">
+            <a:fld id="{4B568C3C-A7FB-44DF-BED2-7FB06A0F0D5A}" type="slidenum">
               <a:rPr lang="en-US" sz="1200" b="0" u="none" strike="noStrike">
                 <a:solidFill>
                   <a:schemeClr val="dk1"/>
@@ -4818,7 +4818,7 @@
       </p:grpSpPr>
       <p:sp>
         <p:nvSpPr>
-          <p:cNvPr id="501" name="PlaceHolder 1"/>
+          <p:cNvPr id="502" name="PlaceHolder 1"/>
           <p:cNvSpPr>
             <a:spLocks noGrp="1"/>
           </p:cNvSpPr>
@@ -4841,7 +4841,7 @@
       </p:sp>
       <p:sp>
         <p:nvSpPr>
-          <p:cNvPr id="502" name="PlaceHolder 2"/>
+          <p:cNvPr id="503" name="PlaceHolder 2"/>
           <p:cNvSpPr>
             <a:spLocks noGrp="1"/>
           </p:cNvSpPr>
@@ -4897,7 +4897,7 @@
       </p:sp>
       <p:sp>
         <p:nvSpPr>
-          <p:cNvPr id="503" name="PlaceHolder 3"/>
+          <p:cNvPr id="504" name="PlaceHolder 3"/>
           <p:cNvSpPr>
             <a:spLocks noGrp="1"/>
           </p:cNvSpPr>
@@ -4946,7 +4946,7 @@
               </a:lnSpc>
               <a:buNone/>
             </a:pPr>
-            <a:fld id="{B67DC36C-929A-4191-8FBB-59FAC5431497}" type="slidenum">
+            <a:fld id="{42AACD7E-580B-41C2-8212-C70C0AE4C899}" type="slidenum">
               <a:rPr lang="en-US" sz="1200" b="0" u="none" strike="noStrike">
                 <a:solidFill>
                   <a:schemeClr val="dk1"/>
@@ -4993,7 +4993,7 @@
       </p:grpSpPr>
       <p:sp>
         <p:nvSpPr>
-          <p:cNvPr id="504" name="PlaceHolder 1"/>
+          <p:cNvPr id="505" name="PlaceHolder 1"/>
           <p:cNvSpPr>
             <a:spLocks noGrp="1"/>
           </p:cNvSpPr>
@@ -5016,7 +5016,7 @@
       </p:sp>
       <p:sp>
         <p:nvSpPr>
-          <p:cNvPr id="505" name="PlaceHolder 2"/>
+          <p:cNvPr id="506" name="PlaceHolder 2"/>
           <p:cNvSpPr>
             <a:spLocks noGrp="1"/>
           </p:cNvSpPr>
@@ -5072,7 +5072,7 @@
       </p:sp>
       <p:sp>
         <p:nvSpPr>
-          <p:cNvPr id="506" name="PlaceHolder 3"/>
+          <p:cNvPr id="507" name="PlaceHolder 3"/>
           <p:cNvSpPr>
             <a:spLocks noGrp="1"/>
           </p:cNvSpPr>
@@ -5121,7 +5121,7 @@
               </a:lnSpc>
               <a:buNone/>
             </a:pPr>
-            <a:fld id="{487C9CBC-89E2-44B3-A206-59D26109559F}" type="slidenum">
+            <a:fld id="{44E642D3-FAF7-462D-AF03-24175CE1FB1A}" type="slidenum">
               <a:rPr lang="en-US" sz="1200" b="0" u="none" strike="noStrike">
                 <a:solidFill>
                   <a:schemeClr val="dk1"/>
@@ -5168,7 +5168,7 @@
       </p:grpSpPr>
       <p:sp>
         <p:nvSpPr>
-          <p:cNvPr id="417" name="PlaceHolder 1"/>
+          <p:cNvPr id="418" name="PlaceHolder 1"/>
           <p:cNvSpPr>
             <a:spLocks noGrp="1"/>
           </p:cNvSpPr>
@@ -5191,7 +5191,7 @@
       </p:sp>
       <p:sp>
         <p:nvSpPr>
-          <p:cNvPr id="418" name="PlaceHolder 2"/>
+          <p:cNvPr id="419" name="PlaceHolder 2"/>
           <p:cNvSpPr>
             <a:spLocks noGrp="1"/>
           </p:cNvSpPr>
@@ -5247,7 +5247,7 @@
       </p:sp>
       <p:sp>
         <p:nvSpPr>
-          <p:cNvPr id="419" name="PlaceHolder 3"/>
+          <p:cNvPr id="420" name="PlaceHolder 3"/>
           <p:cNvSpPr>
             <a:spLocks noGrp="1"/>
           </p:cNvSpPr>
@@ -5296,7 +5296,7 @@
               </a:lnSpc>
               <a:buNone/>
             </a:pPr>
-            <a:fld id="{962FE847-A376-4134-9BB4-541410987E2A}" type="slidenum">
+            <a:fld id="{77A143EB-EDFC-47B3-B70E-47E41CF715E2}" type="slidenum">
               <a:rPr lang="en-US" sz="1200" b="0" u="none" strike="noStrike">
                 <a:solidFill>
                   <a:schemeClr val="dk1"/>
@@ -5343,7 +5343,7 @@
       </p:grpSpPr>
       <p:sp>
         <p:nvSpPr>
-          <p:cNvPr id="420" name="PlaceHolder 1"/>
+          <p:cNvPr id="421" name="PlaceHolder 1"/>
           <p:cNvSpPr>
             <a:spLocks noGrp="1"/>
           </p:cNvSpPr>
@@ -5366,7 +5366,7 @@
       </p:sp>
       <p:sp>
         <p:nvSpPr>
-          <p:cNvPr id="421" name="PlaceHolder 2"/>
+          <p:cNvPr id="422" name="PlaceHolder 2"/>
           <p:cNvSpPr>
             <a:spLocks noGrp="1"/>
           </p:cNvSpPr>
@@ -5422,7 +5422,7 @@
       </p:sp>
       <p:sp>
         <p:nvSpPr>
-          <p:cNvPr id="422" name="PlaceHolder 3"/>
+          <p:cNvPr id="423" name="PlaceHolder 3"/>
           <p:cNvSpPr>
             <a:spLocks noGrp="1"/>
           </p:cNvSpPr>
@@ -5471,7 +5471,7 @@
               </a:lnSpc>
               <a:buNone/>
             </a:pPr>
-            <a:fld id="{BD32F240-6E3F-4CF2-AAEE-AED0F6E055E6}" type="slidenum">
+            <a:fld id="{2EF84301-D5AC-453F-991D-67260B19436B}" type="slidenum">
               <a:rPr lang="en-US" sz="1200" b="0" u="none" strike="noStrike">
                 <a:solidFill>
                   <a:schemeClr val="dk1"/>
@@ -5518,7 +5518,7 @@
       </p:grpSpPr>
       <p:sp>
         <p:nvSpPr>
-          <p:cNvPr id="423" name="PlaceHolder 1"/>
+          <p:cNvPr id="424" name="PlaceHolder 1"/>
           <p:cNvSpPr>
             <a:spLocks noGrp="1"/>
           </p:cNvSpPr>
@@ -5541,7 +5541,7 @@
       </p:sp>
       <p:sp>
         <p:nvSpPr>
-          <p:cNvPr id="424" name="PlaceHolder 2"/>
+          <p:cNvPr id="425" name="PlaceHolder 2"/>
           <p:cNvSpPr>
             <a:spLocks noGrp="1"/>
           </p:cNvSpPr>
@@ -5597,7 +5597,7 @@
       </p:sp>
       <p:sp>
         <p:nvSpPr>
-          <p:cNvPr id="425" name="PlaceHolder 3"/>
+          <p:cNvPr id="426" name="PlaceHolder 3"/>
           <p:cNvSpPr>
             <a:spLocks noGrp="1"/>
           </p:cNvSpPr>
@@ -5646,7 +5646,7 @@
               </a:lnSpc>
               <a:buNone/>
             </a:pPr>
-            <a:fld id="{037066BA-80B7-445F-AA61-D94E2996502D}" type="slidenum">
+            <a:fld id="{D8280734-2155-4777-BAC6-A096B0B4B5AB}" type="slidenum">
               <a:rPr lang="en-US" sz="1200" b="0" u="none" strike="noStrike">
                 <a:solidFill>
                   <a:schemeClr val="dk1"/>
@@ -5693,7 +5693,7 @@
       </p:grpSpPr>
       <p:sp>
         <p:nvSpPr>
-          <p:cNvPr id="426" name="PlaceHolder 1"/>
+          <p:cNvPr id="427" name="PlaceHolder 1"/>
           <p:cNvSpPr>
             <a:spLocks noGrp="1"/>
           </p:cNvSpPr>
@@ -5716,7 +5716,7 @@
       </p:sp>
       <p:sp>
         <p:nvSpPr>
-          <p:cNvPr id="427" name="PlaceHolder 2"/>
+          <p:cNvPr id="428" name="PlaceHolder 2"/>
           <p:cNvSpPr>
             <a:spLocks noGrp="1"/>
           </p:cNvSpPr>
@@ -5772,7 +5772,7 @@
       </p:sp>
       <p:sp>
         <p:nvSpPr>
-          <p:cNvPr id="428" name="PlaceHolder 3"/>
+          <p:cNvPr id="429" name="PlaceHolder 3"/>
           <p:cNvSpPr>
             <a:spLocks noGrp="1"/>
           </p:cNvSpPr>
@@ -5821,7 +5821,7 @@
               </a:lnSpc>
               <a:buNone/>
             </a:pPr>
-            <a:fld id="{E2322E44-B6E6-4116-861F-E794D077770C}" type="slidenum">
+            <a:fld id="{E8BA3306-9C51-4B57-B37D-1762B3F1902B}" type="slidenum">
               <a:rPr lang="en-US" sz="1200" b="0" u="none" strike="noStrike">
                 <a:solidFill>
                   <a:schemeClr val="dk1"/>
@@ -5868,7 +5868,7 @@
       </p:grpSpPr>
       <p:sp>
         <p:nvSpPr>
-          <p:cNvPr id="429" name="PlaceHolder 1"/>
+          <p:cNvPr id="430" name="PlaceHolder 1"/>
           <p:cNvSpPr>
             <a:spLocks noGrp="1"/>
           </p:cNvSpPr>
@@ -5891,7 +5891,7 @@
       </p:sp>
       <p:sp>
         <p:nvSpPr>
-          <p:cNvPr id="430" name="PlaceHolder 2"/>
+          <p:cNvPr id="431" name="PlaceHolder 2"/>
           <p:cNvSpPr>
             <a:spLocks noGrp="1"/>
           </p:cNvSpPr>
@@ -5947,7 +5947,7 @@
       </p:sp>
       <p:sp>
         <p:nvSpPr>
-          <p:cNvPr id="431" name="PlaceHolder 3"/>
+          <p:cNvPr id="432" name="PlaceHolder 3"/>
           <p:cNvSpPr>
             <a:spLocks noGrp="1"/>
           </p:cNvSpPr>
@@ -5996,7 +5996,7 @@
               </a:lnSpc>
               <a:buNone/>
             </a:pPr>
-            <a:fld id="{6993D1FD-5D21-44C9-8A56-AD30F0F08147}" type="slidenum">
+            <a:fld id="{16CE938B-F8CC-4258-84BC-6360EB44A23B}" type="slidenum">
               <a:rPr lang="en-US" sz="1200" b="0" u="none" strike="noStrike">
                 <a:solidFill>
                   <a:schemeClr val="dk1"/>
@@ -6043,7 +6043,7 @@
       </p:grpSpPr>
       <p:sp>
         <p:nvSpPr>
-          <p:cNvPr id="432" name="PlaceHolder 1"/>
+          <p:cNvPr id="433" name="PlaceHolder 1"/>
           <p:cNvSpPr>
             <a:spLocks noGrp="1"/>
           </p:cNvSpPr>
@@ -6066,7 +6066,7 @@
       </p:sp>
       <p:sp>
         <p:nvSpPr>
-          <p:cNvPr id="433" name="PlaceHolder 2"/>
+          <p:cNvPr id="434" name="PlaceHolder 2"/>
           <p:cNvSpPr>
             <a:spLocks noGrp="1"/>
           </p:cNvSpPr>
@@ -6122,7 +6122,7 @@
       </p:sp>
       <p:sp>
         <p:nvSpPr>
-          <p:cNvPr id="434" name="PlaceHolder 3"/>
+          <p:cNvPr id="435" name="PlaceHolder 3"/>
           <p:cNvSpPr>
             <a:spLocks noGrp="1"/>
           </p:cNvSpPr>
@@ -6171,7 +6171,7 @@
               </a:lnSpc>
               <a:buNone/>
             </a:pPr>
-            <a:fld id="{0AF4EC4B-C5FE-4317-ACEF-F028B2318B8E}" type="slidenum">
+            <a:fld id="{FEEC815F-EBE4-4EF8-BFFA-591A585A4434}" type="slidenum">
               <a:rPr lang="en-US" sz="1200" b="0" u="none" strike="noStrike">
                 <a:solidFill>
                   <a:schemeClr val="dk1"/>
@@ -7098,7 +7098,7 @@
               </a:tabLst>
             </a:pPr>
             <a:r>
-              <a:rPr lang="en-US" sz="1300" b="0" u="none" strike="noStrike">
+              <a:rPr lang="en-US" sz="1250" b="0" u="none" strike="noStrike">
                 <a:solidFill>
                   <a:srgbClr val="1E293B"/>
                 </a:solidFill>
@@ -7107,9 +7107,9 @@
                 <a:latin typeface="Courier New"/>
                 <a:ea typeface="Courier New"/>
               </a:rPr>
-              <a:t>r = client.embeddings.create(</a:t>
-            </a:r>
-            <a:endParaRPr lang="en-IN" sz="1300" b="0" u="none" strike="noStrike">
+              <a:t>from sentence_transformers import SentenceTransformer</a:t>
+            </a:r>
+            <a:endParaRPr lang="en-IN" sz="1250" b="0" u="none" strike="noStrike">
               <a:solidFill>
                 <a:srgbClr val="000000"/>
               </a:solidFill>
@@ -7127,19 +7127,7 @@
                 <a:tab pos="0" algn="l"/>
               </a:tabLst>
             </a:pPr>
-            <a:r>
-              <a:rPr lang="en-US" sz="1300" b="0" u="none" strike="noStrike">
-                <a:solidFill>
-                  <a:srgbClr val="1E293B"/>
-                </a:solidFill>
-                <a:effectLst/>
-                <a:uFillTx/>
-                <a:latin typeface="Courier New"/>
-                <a:ea typeface="Courier New"/>
-              </a:rPr>
-              <a:t>    model="text-embedding-3-small",</a:t>
-            </a:r>
-            <a:endParaRPr lang="en-IN" sz="1300" b="0" u="none" strike="noStrike">
+            <a:endParaRPr lang="en-IN" sz="1250" b="0" u="none" strike="noStrike">
               <a:solidFill>
                 <a:srgbClr val="000000"/>
               </a:solidFill>
@@ -7158,7 +7146,7 @@
               </a:tabLst>
             </a:pPr>
             <a:r>
-              <a:rPr lang="en-US" sz="1300" b="0" u="none" strike="noStrike">
+              <a:rPr lang="en-US" sz="1250" b="0" u="none" strike="noStrike">
                 <a:solidFill>
                   <a:srgbClr val="1E293B"/>
                 </a:solidFill>
@@ -7167,9 +7155,9 @@
                 <a:latin typeface="Courier New"/>
                 <a:ea typeface="Courier New"/>
               </a:rPr>
-              <a:t>    input="How do I cancel my order?",</a:t>
-            </a:r>
-            <a:endParaRPr lang="en-IN" sz="1300" b="0" u="none" strike="noStrike">
+              <a:t>model = SentenceTransformer('all-MiniLM-L6-v2')</a:t>
+            </a:r>
+            <a:endParaRPr lang="en-IN" sz="1250" b="0" u="none" strike="noStrike">
               <a:solidFill>
                 <a:srgbClr val="000000"/>
               </a:solidFill>
@@ -7187,19 +7175,7 @@
                 <a:tab pos="0" algn="l"/>
               </a:tabLst>
             </a:pPr>
-            <a:r>
-              <a:rPr lang="en-US" sz="1300" b="0" u="none" strike="noStrike">
-                <a:solidFill>
-                  <a:srgbClr val="1E293B"/>
-                </a:solidFill>
-                <a:effectLst/>
-                <a:uFillTx/>
-                <a:latin typeface="Courier New"/>
-                <a:ea typeface="Courier New"/>
-              </a:rPr>
-              <a:t>)</a:t>
-            </a:r>
-            <a:endParaRPr lang="en-IN" sz="1300" b="0" u="none" strike="noStrike">
+            <a:endParaRPr lang="en-IN" sz="1250" b="0" u="none" strike="noStrike">
               <a:solidFill>
                 <a:srgbClr val="000000"/>
               </a:solidFill>
@@ -7218,7 +7194,7 @@
               </a:tabLst>
             </a:pPr>
             <a:r>
-              <a:rPr lang="en-US" sz="1300" b="0" u="none" strike="noStrike">
+              <a:rPr lang="en-US" sz="1250" b="0" u="none" strike="noStrike">
                 <a:solidFill>
                   <a:srgbClr val="1E293B"/>
                 </a:solidFill>
@@ -7227,9 +7203,9 @@
                 <a:latin typeface="Courier New"/>
                 <a:ea typeface="Courier New"/>
               </a:rPr>
-              <a:t>vector = r.data[0].embedding</a:t>
-            </a:r>
-            <a:endParaRPr lang="en-IN" sz="1300" b="0" u="none" strike="noStrike">
+              <a:t>texts = ["Machine learning is a branch of AI",</a:t>
+            </a:r>
+            <a:endParaRPr lang="en-IN" sz="1250" b="0" u="none" strike="noStrike">
               <a:solidFill>
                 <a:srgbClr val="000000"/>
               </a:solidFill>
@@ -7247,7 +7223,19 @@
                 <a:tab pos="0" algn="l"/>
               </a:tabLst>
             </a:pPr>
-            <a:endParaRPr lang="en-IN" sz="1300" b="0" u="none" strike="noStrike">
+            <a:r>
+              <a:rPr lang="en-US" sz="1250" b="0" u="none" strike="noStrike">
+                <a:solidFill>
+                  <a:srgbClr val="1E293B"/>
+                </a:solidFill>
+                <a:effectLst/>
+                <a:uFillTx/>
+                <a:latin typeface="Courier New"/>
+                <a:ea typeface="Courier New"/>
+              </a:rPr>
+              <a:t>         "Deep learning uses neural networks",</a:t>
+            </a:r>
+            <a:endParaRPr lang="en-IN" sz="1250" b="0" u="none" strike="noStrike">
               <a:solidFill>
                 <a:srgbClr val="000000"/>
               </a:solidFill>
@@ -7266,7 +7254,7 @@
               </a:tabLst>
             </a:pPr>
             <a:r>
-              <a:rPr lang="en-US" sz="1300" b="0" u="none" strike="noStrike">
+              <a:rPr lang="en-US" sz="1250" b="0" u="none" strike="noStrike">
                 <a:solidFill>
                   <a:srgbClr val="1E293B"/>
                 </a:solidFill>
@@ -7275,9 +7263,9 @@
                 <a:latin typeface="Courier New"/>
                 <a:ea typeface="Courier New"/>
               </a:rPr>
-              <a:t>len(vector)   # 1536</a:t>
-            </a:r>
-            <a:endParaRPr lang="en-IN" sz="1300" b="0" u="none" strike="noStrike">
+              <a:t>         "I love cooking Indian food",</a:t>
+            </a:r>
+            <a:endParaRPr lang="en-IN" sz="1250" b="0" u="none" strike="noStrike">
               <a:solidFill>
                 <a:srgbClr val="000000"/>
               </a:solidFill>
@@ -7296,7 +7284,7 @@
               </a:tabLst>
             </a:pPr>
             <a:r>
-              <a:rPr lang="en-US" sz="1300" b="0" u="none" strike="noStrike">
+              <a:rPr lang="en-US" sz="1250" b="0" u="none" strike="noStrike">
                 <a:solidFill>
                   <a:srgbClr val="1E293B"/>
                 </a:solidFill>
@@ -7305,9 +7293,87 @@
                 <a:latin typeface="Courier New"/>
                 <a:ea typeface="Courier New"/>
               </a:rPr>
-              <a:t>vector[:5]    # [-0.014, 0.031, -0.006, 0.018, -0.022]</a:t>
-            </a:r>
-            <a:endParaRPr lang="en-IN" sz="1300" b="0" u="none" strike="noStrike">
+              <a:t>         "Cricket is popular in India"]</a:t>
+            </a:r>
+            <a:endParaRPr lang="en-IN" sz="1250" b="0" u="none" strike="noStrike">
+              <a:solidFill>
+                <a:srgbClr val="000000"/>
+              </a:solidFill>
+              <a:effectLst/>
+              <a:uFillTx/>
+              <a:latin typeface="Arial"/>
+            </a:endParaRPr>
+          </a:p>
+          <a:p>
+            <a:pPr defTabSz="914400">
+              <a:lnSpc>
+                <a:spcPct val="115000"/>
+              </a:lnSpc>
+              <a:tabLst>
+                <a:tab pos="0" algn="l"/>
+              </a:tabLst>
+            </a:pPr>
+            <a:endParaRPr lang="en-IN" sz="1250" b="0" u="none" strike="noStrike">
+              <a:solidFill>
+                <a:srgbClr val="000000"/>
+              </a:solidFill>
+              <a:effectLst/>
+              <a:uFillTx/>
+              <a:latin typeface="Arial"/>
+            </a:endParaRPr>
+          </a:p>
+          <a:p>
+            <a:pPr defTabSz="914400">
+              <a:lnSpc>
+                <a:spcPct val="115000"/>
+              </a:lnSpc>
+              <a:tabLst>
+                <a:tab pos="0" algn="l"/>
+              </a:tabLst>
+            </a:pPr>
+            <a:r>
+              <a:rPr lang="en-US" sz="1250" b="0" u="none" strike="noStrike">
+                <a:solidFill>
+                  <a:srgbClr val="1E293B"/>
+                </a:solidFill>
+                <a:effectLst/>
+                <a:uFillTx/>
+                <a:latin typeface="Courier New"/>
+                <a:ea typeface="Courier New"/>
+              </a:rPr>
+              <a:t>embeddings = model.encode(texts)</a:t>
+            </a:r>
+            <a:endParaRPr lang="en-IN" sz="1250" b="0" u="none" strike="noStrike">
+              <a:solidFill>
+                <a:srgbClr val="000000"/>
+              </a:solidFill>
+              <a:effectLst/>
+              <a:uFillTx/>
+              <a:latin typeface="Arial"/>
+            </a:endParaRPr>
+          </a:p>
+          <a:p>
+            <a:pPr defTabSz="914400">
+              <a:lnSpc>
+                <a:spcPct val="115000"/>
+              </a:lnSpc>
+              <a:tabLst>
+                <a:tab pos="0" algn="l"/>
+              </a:tabLst>
+            </a:pPr>
+            <a:r>
+              <a:rPr lang="en-US" sz="1250" b="0" u="none" strike="noStrike">
+                <a:solidFill>
+                  <a:srgbClr val="1E293B"/>
+                </a:solidFill>
+                <a:effectLst/>
+                <a:uFillTx/>
+                <a:latin typeface="Courier New"/>
+                <a:ea typeface="Courier New"/>
+              </a:rPr>
+              <a:t>embeddings.shape        # (4, 384)</a:t>
+            </a:r>
+            <a:endParaRPr lang="en-IN" sz="1250" b="0" u="none" strike="noStrike">
               <a:solidFill>
                 <a:srgbClr val="000000"/>
               </a:solidFill>
@@ -7580,7 +7646,7 @@
                 <a:latin typeface="Calibri"/>
                 <a:ea typeface="Calibri"/>
               </a:rPr>
-              <a:t>its own endpoint: .embeddings</a:t>
+              <a:t>free · local · no API key</a:t>
             </a:r>
             <a:endParaRPr lang="en-IN" sz="1400" b="0" u="none" strike="noStrike">
               <a:solidFill>
@@ -7724,7 +7790,7 @@
                 <a:latin typeface="Calibri"/>
                 <a:ea typeface="Calibri"/>
               </a:rPr>
-              <a:t>Three words or three paragraphs — always 1536 numbers. </a:t>
+              <a:t>Three words or three paragraphs — always 384 numbers. </a:t>
             </a:r>
             <a:r>
               <a:rPr lang="en-US" sz="1600" b="0" u="none" strike="noStrike">
@@ -8440,7 +8506,7 @@
                 <a:latin typeface="Calibri"/>
                 <a:ea typeface="Calibri"/>
               </a:rPr>
-              <a:t>An embedding · 1536 numbers</a:t>
+              <a:t>An embedding · 384 numbers</a:t>
             </a:r>
             <a:endParaRPr lang="en-IN" sz="1900" b="0" u="none" strike="noStrike">
               <a:solidFill>
@@ -8501,7 +8567,7 @@
                 <a:latin typeface="Courier New"/>
                 <a:ea typeface="Courier New"/>
               </a:rPr>
-              <a:t>“cancel my order”   →  ·</a:t>
+              <a:t>“machine learning”  →  ·</a:t>
             </a:r>
             <a:endParaRPr lang="en-IN" sz="1300" b="0" u="none" strike="noStrike">
               <a:solidFill>
@@ -8531,7 +8597,7 @@
                 <a:latin typeface="Courier New"/>
                 <a:ea typeface="Courier New"/>
               </a:rPr>
-              <a:t>“return this item”  →  ·   ← close</a:t>
+              <a:t>“deep learning”     →  ·   ← close</a:t>
             </a:r>
             <a:endParaRPr lang="en-IN" sz="1300" b="0" u="none" strike="noStrike">
               <a:solidFill>
@@ -8561,7 +8627,7 @@
                 <a:latin typeface="Courier New"/>
                 <a:ea typeface="Courier New"/>
               </a:rPr>
-              <a:t>“Eiffel Tower”      →        ·</a:t>
+              <a:t>“cooking”           →        ·</a:t>
             </a:r>
             <a:endParaRPr lang="en-IN" sz="1300" b="0" u="none" strike="noStrike">
               <a:solidFill>
@@ -8622,7 +8688,7 @@
                 <a:latin typeface="Calibri"/>
                 <a:ea typeface="Calibri"/>
               </a:rPr>
-              <a:t>Same rule, 1536 axes instead of 2 —</a:t>
+              <a:t>Same rule, 384 axes instead of 2 —</a:t>
             </a:r>
             <a:endParaRPr lang="en-IN" sz="1400" b="0" u="none" strike="noStrike">
               <a:solidFill>
@@ -9243,6 +9309,272 @@
                       <a:r>
                         <a:rPr lang="en-US" sz="1250" b="0" u="none" strike="noStrike">
                           <a:solidFill>
+                            <a:srgbClr val="0891B2"/>
+                          </a:solidFill>
+                          <a:effectLst/>
+                          <a:uFillTx/>
+                          <a:latin typeface="Courier New"/>
+                          <a:ea typeface="Courier New"/>
+                        </a:rPr>
+                        <a:t>all-MiniLM-L6-v2</a:t>
+                      </a:r>
+                      <a:endParaRPr lang="en-IN" sz="1250" b="0" u="none" strike="noStrike">
+                        <a:solidFill>
+                          <a:srgbClr val="000000"/>
+                        </a:solidFill>
+                        <a:effectLst/>
+                        <a:uFillTx/>
+                        <a:latin typeface="Arial"/>
+                      </a:endParaRPr>
+                    </a:p>
+                  </a:txBody>
+                  <a:tcPr anchor="ctr" marL="101520" marR="101520" marT="37800" marB="37800">
+                    <a:lnL w="12240">
+                      <a:solidFill>
+                        <a:srgbClr val="E2E8F0"/>
+                      </a:solidFill>
+                      <a:prstDash val="solid"/>
+                    </a:lnL>
+                    <a:lnR w="12240">
+                      <a:solidFill>
+                        <a:srgbClr val="E2E8F0"/>
+                      </a:solidFill>
+                      <a:prstDash val="solid"/>
+                    </a:lnR>
+                    <a:lnT w="12240">
+                      <a:solidFill>
+                        <a:srgbClr val="E2E8F0"/>
+                      </a:solidFill>
+                      <a:prstDash val="solid"/>
+                    </a:lnT>
+                    <a:lnB w="12240">
+                      <a:solidFill>
+                        <a:srgbClr val="E2E8F0"/>
+                      </a:solidFill>
+                      <a:prstDash val="solid"/>
+                    </a:lnB>
+                    <a:solidFill>
+                      <a:srgbClr val="FFFFFF"/>
+                    </a:solidFill>
+                  </a:tcPr>
+                </a:tc>
+                <a:tc>
+                  <a:txBody>
+                    <a:bodyPr lIns="101520" tIns="37800" rIns="101520" bIns="37800" anchor="ctr">
+                      <a:noAutofit/>
+                    </a:bodyPr>
+                    <a:p>
+                      <a:pPr defTabSz="914400">
+                        <a:lnSpc>
+                          <a:spcPct val="100000"/>
+                        </a:lnSpc>
+                        <a:tabLst>
+                          <a:tab pos="0" algn="l"/>
+                        </a:tabLst>
+                      </a:pPr>
+                      <a:r>
+                        <a:rPr lang="en-US" sz="1250" b="0" u="none" strike="noStrike">
+                          <a:solidFill>
+                            <a:srgbClr val="1E293B"/>
+                          </a:solidFill>
+                          <a:effectLst/>
+                          <a:uFillTx/>
+                          <a:latin typeface="Calibri"/>
+                          <a:ea typeface="Calibri"/>
+                        </a:rPr>
+                        <a:t>384</a:t>
+                      </a:r>
+                      <a:endParaRPr lang="en-IN" sz="1250" b="0" u="none" strike="noStrike">
+                        <a:solidFill>
+                          <a:srgbClr val="000000"/>
+                        </a:solidFill>
+                        <a:effectLst/>
+                        <a:uFillTx/>
+                        <a:latin typeface="Arial"/>
+                      </a:endParaRPr>
+                    </a:p>
+                  </a:txBody>
+                  <a:tcPr anchor="ctr" marL="101520" marR="101520" marT="37800" marB="37800">
+                    <a:lnL w="12240">
+                      <a:solidFill>
+                        <a:srgbClr val="E2E8F0"/>
+                      </a:solidFill>
+                      <a:prstDash val="solid"/>
+                    </a:lnL>
+                    <a:lnR w="12240">
+                      <a:solidFill>
+                        <a:srgbClr val="E2E8F0"/>
+                      </a:solidFill>
+                      <a:prstDash val="solid"/>
+                    </a:lnR>
+                    <a:lnT w="12240">
+                      <a:solidFill>
+                        <a:srgbClr val="E2E8F0"/>
+                      </a:solidFill>
+                      <a:prstDash val="solid"/>
+                    </a:lnT>
+                    <a:lnB w="12240">
+                      <a:solidFill>
+                        <a:srgbClr val="E2E8F0"/>
+                      </a:solidFill>
+                      <a:prstDash val="solid"/>
+                    </a:lnB>
+                    <a:solidFill>
+                      <a:srgbClr val="FFFFFF"/>
+                    </a:solidFill>
+                  </a:tcPr>
+                </a:tc>
+                <a:tc>
+                  <a:txBody>
+                    <a:bodyPr lIns="101520" tIns="37800" rIns="101520" bIns="37800" anchor="ctr">
+                      <a:noAutofit/>
+                    </a:bodyPr>
+                    <a:p>
+                      <a:pPr defTabSz="914400">
+                        <a:lnSpc>
+                          <a:spcPct val="100000"/>
+                        </a:lnSpc>
+                        <a:tabLst>
+                          <a:tab pos="0" algn="l"/>
+                        </a:tabLst>
+                      </a:pPr>
+                      <a:r>
+                        <a:rPr lang="en-US" sz="1250" b="0" u="none" strike="noStrike">
+                          <a:solidFill>
+                            <a:srgbClr val="15803D"/>
+                          </a:solidFill>
+                          <a:effectLst/>
+                          <a:uFillTx/>
+                          <a:latin typeface="Calibri"/>
+                          <a:ea typeface="Calibri"/>
+                        </a:rPr>
+                        <a:t>free · local</a:t>
+                      </a:r>
+                      <a:endParaRPr lang="en-IN" sz="1250" b="0" u="none" strike="noStrike">
+                        <a:solidFill>
+                          <a:srgbClr val="000000"/>
+                        </a:solidFill>
+                        <a:effectLst/>
+                        <a:uFillTx/>
+                        <a:latin typeface="Arial"/>
+                      </a:endParaRPr>
+                    </a:p>
+                  </a:txBody>
+                  <a:tcPr anchor="ctr" marL="101520" marR="101520" marT="37800" marB="37800">
+                    <a:lnL w="12240">
+                      <a:solidFill>
+                        <a:srgbClr val="E2E8F0"/>
+                      </a:solidFill>
+                      <a:prstDash val="solid"/>
+                    </a:lnL>
+                    <a:lnR w="12240">
+                      <a:solidFill>
+                        <a:srgbClr val="E2E8F0"/>
+                      </a:solidFill>
+                      <a:prstDash val="solid"/>
+                    </a:lnR>
+                    <a:lnT w="12240">
+                      <a:solidFill>
+                        <a:srgbClr val="E2E8F0"/>
+                      </a:solidFill>
+                      <a:prstDash val="solid"/>
+                    </a:lnT>
+                    <a:lnB w="12240">
+                      <a:solidFill>
+                        <a:srgbClr val="E2E8F0"/>
+                      </a:solidFill>
+                      <a:prstDash val="solid"/>
+                    </a:lnB>
+                    <a:solidFill>
+                      <a:srgbClr val="FFFFFF"/>
+                    </a:solidFill>
+                  </a:tcPr>
+                </a:tc>
+                <a:tc>
+                  <a:txBody>
+                    <a:bodyPr lIns="101520" tIns="37800" rIns="101520" bIns="37800" anchor="ctr">
+                      <a:noAutofit/>
+                    </a:bodyPr>
+                    <a:p>
+                      <a:pPr defTabSz="914400">
+                        <a:lnSpc>
+                          <a:spcPct val="100000"/>
+                        </a:lnSpc>
+                        <a:tabLst>
+                          <a:tab pos="0" algn="l"/>
+                        </a:tabLst>
+                      </a:pPr>
+                      <a:r>
+                        <a:rPr lang="en-US" sz="1250" b="0" u="none" strike="noStrike">
+                          <a:solidFill>
+                            <a:srgbClr val="15803D"/>
+                          </a:solidFill>
+                          <a:effectLst/>
+                          <a:uFillTx/>
+                          <a:latin typeface="Calibri"/>
+                          <a:ea typeface="Calibri"/>
+                        </a:rPr>
+                        <a:t>we build with this today ✓</a:t>
+                      </a:r>
+                      <a:endParaRPr lang="en-IN" sz="1250" b="0" u="none" strike="noStrike">
+                        <a:solidFill>
+                          <a:srgbClr val="000000"/>
+                        </a:solidFill>
+                        <a:effectLst/>
+                        <a:uFillTx/>
+                        <a:latin typeface="Arial"/>
+                      </a:endParaRPr>
+                    </a:p>
+                  </a:txBody>
+                  <a:tcPr anchor="ctr" marL="101520" marR="101520" marT="37800" marB="37800">
+                    <a:lnL w="12240">
+                      <a:solidFill>
+                        <a:srgbClr val="E2E8F0"/>
+                      </a:solidFill>
+                      <a:prstDash val="solid"/>
+                    </a:lnL>
+                    <a:lnR w="12240">
+                      <a:solidFill>
+                        <a:srgbClr val="E2E8F0"/>
+                      </a:solidFill>
+                      <a:prstDash val="solid"/>
+                    </a:lnR>
+                    <a:lnT w="12240">
+                      <a:solidFill>
+                        <a:srgbClr val="E2E8F0"/>
+                      </a:solidFill>
+                      <a:prstDash val="solid"/>
+                    </a:lnT>
+                    <a:lnB w="12240">
+                      <a:solidFill>
+                        <a:srgbClr val="E2E8F0"/>
+                      </a:solidFill>
+                      <a:prstDash val="solid"/>
+                    </a:lnB>
+                    <a:solidFill>
+                      <a:srgbClr val="FFFFFF"/>
+                    </a:solidFill>
+                  </a:tcPr>
+                </a:tc>
+              </a:tr>
+              <a:tr h="621720">
+                <a:tc>
+                  <a:txBody>
+                    <a:bodyPr lIns="101520" tIns="37800" rIns="101520" bIns="37800" anchor="ctr">
+                      <a:noAutofit/>
+                    </a:bodyPr>
+                    <a:p>
+                      <a:pPr defTabSz="914400">
+                        <a:lnSpc>
+                          <a:spcPct val="100000"/>
+                        </a:lnSpc>
+                        <a:tabLst>
+                          <a:tab pos="0" algn="l"/>
+                        </a:tabLst>
+                      </a:pPr>
+                      <a:r>
+                        <a:rPr lang="en-US" sz="1250" b="0" u="none" strike="noStrike">
+                          <a:solidFill>
                             <a:srgbClr val="6366F1"/>
                           </a:solidFill>
                           <a:effectLst/>
@@ -9448,7 +9780,7 @@
                           <a:latin typeface="Calibri"/>
                           <a:ea typeface="Calibri"/>
                         </a:rPr>
-                        <a:t>the default — today ✓</a:t>
+                        <a:t>the hosted default — §5</a:t>
                       </a:r>
                       <a:endParaRPr lang="en-IN" sz="1250" b="0" u="none" strike="noStrike">
                         <a:solidFill>
@@ -10023,272 +10355,6 @@
                   </a:tcPr>
                 </a:tc>
               </a:tr>
-              <a:tr h="621720">
-                <a:tc>
-                  <a:txBody>
-                    <a:bodyPr lIns="101520" tIns="37800" rIns="101520" bIns="37800" anchor="ctr">
-                      <a:noAutofit/>
-                    </a:bodyPr>
-                    <a:p>
-                      <a:pPr defTabSz="914400">
-                        <a:lnSpc>
-                          <a:spcPct val="100000"/>
-                        </a:lnSpc>
-                        <a:tabLst>
-                          <a:tab pos="0" algn="l"/>
-                        </a:tabLst>
-                      </a:pPr>
-                      <a:r>
-                        <a:rPr lang="en-US" sz="1250" b="0" u="none" strike="noStrike">
-                          <a:solidFill>
-                            <a:srgbClr val="0891B2"/>
-                          </a:solidFill>
-                          <a:effectLst/>
-                          <a:uFillTx/>
-                          <a:latin typeface="Courier New"/>
-                          <a:ea typeface="Courier New"/>
-                        </a:rPr>
-                        <a:t>all-MiniLM-L6-v2</a:t>
-                      </a:r>
-                      <a:endParaRPr lang="en-IN" sz="1250" b="0" u="none" strike="noStrike">
-                        <a:solidFill>
-                          <a:srgbClr val="000000"/>
-                        </a:solidFill>
-                        <a:effectLst/>
-                        <a:uFillTx/>
-                        <a:latin typeface="Arial"/>
-                      </a:endParaRPr>
-                    </a:p>
-                  </a:txBody>
-                  <a:tcPr anchor="ctr" marL="101520" marR="101520" marT="37800" marB="37800">
-                    <a:lnL w="12240">
-                      <a:solidFill>
-                        <a:srgbClr val="E2E8F0"/>
-                      </a:solidFill>
-                      <a:prstDash val="solid"/>
-                    </a:lnL>
-                    <a:lnR w="12240">
-                      <a:solidFill>
-                        <a:srgbClr val="E2E8F0"/>
-                      </a:solidFill>
-                      <a:prstDash val="solid"/>
-                    </a:lnR>
-                    <a:lnT w="12240">
-                      <a:solidFill>
-                        <a:srgbClr val="E2E8F0"/>
-                      </a:solidFill>
-                      <a:prstDash val="solid"/>
-                    </a:lnT>
-                    <a:lnB w="12240">
-                      <a:solidFill>
-                        <a:srgbClr val="E2E8F0"/>
-                      </a:solidFill>
-                      <a:prstDash val="solid"/>
-                    </a:lnB>
-                    <a:solidFill>
-                      <a:srgbClr val="FFFFFF"/>
-                    </a:solidFill>
-                  </a:tcPr>
-                </a:tc>
-                <a:tc>
-                  <a:txBody>
-                    <a:bodyPr lIns="101520" tIns="37800" rIns="101520" bIns="37800" anchor="ctr">
-                      <a:noAutofit/>
-                    </a:bodyPr>
-                    <a:p>
-                      <a:pPr defTabSz="914400">
-                        <a:lnSpc>
-                          <a:spcPct val="100000"/>
-                        </a:lnSpc>
-                        <a:tabLst>
-                          <a:tab pos="0" algn="l"/>
-                        </a:tabLst>
-                      </a:pPr>
-                      <a:r>
-                        <a:rPr lang="en-US" sz="1250" b="0" u="none" strike="noStrike">
-                          <a:solidFill>
-                            <a:srgbClr val="1E293B"/>
-                          </a:solidFill>
-                          <a:effectLst/>
-                          <a:uFillTx/>
-                          <a:latin typeface="Calibri"/>
-                          <a:ea typeface="Calibri"/>
-                        </a:rPr>
-                        <a:t>384</a:t>
-                      </a:r>
-                      <a:endParaRPr lang="en-IN" sz="1250" b="0" u="none" strike="noStrike">
-                        <a:solidFill>
-                          <a:srgbClr val="000000"/>
-                        </a:solidFill>
-                        <a:effectLst/>
-                        <a:uFillTx/>
-                        <a:latin typeface="Arial"/>
-                      </a:endParaRPr>
-                    </a:p>
-                  </a:txBody>
-                  <a:tcPr anchor="ctr" marL="101520" marR="101520" marT="37800" marB="37800">
-                    <a:lnL w="12240">
-                      <a:solidFill>
-                        <a:srgbClr val="E2E8F0"/>
-                      </a:solidFill>
-                      <a:prstDash val="solid"/>
-                    </a:lnL>
-                    <a:lnR w="12240">
-                      <a:solidFill>
-                        <a:srgbClr val="E2E8F0"/>
-                      </a:solidFill>
-                      <a:prstDash val="solid"/>
-                    </a:lnR>
-                    <a:lnT w="12240">
-                      <a:solidFill>
-                        <a:srgbClr val="E2E8F0"/>
-                      </a:solidFill>
-                      <a:prstDash val="solid"/>
-                    </a:lnT>
-                    <a:lnB w="12240">
-                      <a:solidFill>
-                        <a:srgbClr val="E2E8F0"/>
-                      </a:solidFill>
-                      <a:prstDash val="solid"/>
-                    </a:lnB>
-                    <a:solidFill>
-                      <a:srgbClr val="FFFFFF"/>
-                    </a:solidFill>
-                  </a:tcPr>
-                </a:tc>
-                <a:tc>
-                  <a:txBody>
-                    <a:bodyPr lIns="101520" tIns="37800" rIns="101520" bIns="37800" anchor="ctr">
-                      <a:noAutofit/>
-                    </a:bodyPr>
-                    <a:p>
-                      <a:pPr defTabSz="914400">
-                        <a:lnSpc>
-                          <a:spcPct val="100000"/>
-                        </a:lnSpc>
-                        <a:tabLst>
-                          <a:tab pos="0" algn="l"/>
-                        </a:tabLst>
-                      </a:pPr>
-                      <a:r>
-                        <a:rPr lang="en-US" sz="1250" b="0" u="none" strike="noStrike">
-                          <a:solidFill>
-                            <a:srgbClr val="15803D"/>
-                          </a:solidFill>
-                          <a:effectLst/>
-                          <a:uFillTx/>
-                          <a:latin typeface="Calibri"/>
-                          <a:ea typeface="Calibri"/>
-                        </a:rPr>
-                        <a:t>free · local</a:t>
-                      </a:r>
-                      <a:endParaRPr lang="en-IN" sz="1250" b="0" u="none" strike="noStrike">
-                        <a:solidFill>
-                          <a:srgbClr val="000000"/>
-                        </a:solidFill>
-                        <a:effectLst/>
-                        <a:uFillTx/>
-                        <a:latin typeface="Arial"/>
-                      </a:endParaRPr>
-                    </a:p>
-                  </a:txBody>
-                  <a:tcPr anchor="ctr" marL="101520" marR="101520" marT="37800" marB="37800">
-                    <a:lnL w="12240">
-                      <a:solidFill>
-                        <a:srgbClr val="E2E8F0"/>
-                      </a:solidFill>
-                      <a:prstDash val="solid"/>
-                    </a:lnL>
-                    <a:lnR w="12240">
-                      <a:solidFill>
-                        <a:srgbClr val="E2E8F0"/>
-                      </a:solidFill>
-                      <a:prstDash val="solid"/>
-                    </a:lnR>
-                    <a:lnT w="12240">
-                      <a:solidFill>
-                        <a:srgbClr val="E2E8F0"/>
-                      </a:solidFill>
-                      <a:prstDash val="solid"/>
-                    </a:lnT>
-                    <a:lnB w="12240">
-                      <a:solidFill>
-                        <a:srgbClr val="E2E8F0"/>
-                      </a:solidFill>
-                      <a:prstDash val="solid"/>
-                    </a:lnB>
-                    <a:solidFill>
-                      <a:srgbClr val="FFFFFF"/>
-                    </a:solidFill>
-                  </a:tcPr>
-                </a:tc>
-                <a:tc>
-                  <a:txBody>
-                    <a:bodyPr lIns="101520" tIns="37800" rIns="101520" bIns="37800" anchor="ctr">
-                      <a:noAutofit/>
-                    </a:bodyPr>
-                    <a:p>
-                      <a:pPr defTabSz="914400">
-                        <a:lnSpc>
-                          <a:spcPct val="100000"/>
-                        </a:lnSpc>
-                        <a:tabLst>
-                          <a:tab pos="0" algn="l"/>
-                        </a:tabLst>
-                      </a:pPr>
-                      <a:r>
-                        <a:rPr lang="en-US" sz="1250" b="0" u="none" strike="noStrike">
-                          <a:solidFill>
-                            <a:srgbClr val="1E293B"/>
-                          </a:solidFill>
-                          <a:effectLst/>
-                          <a:uFillTx/>
-                          <a:latin typeface="Calibri"/>
-                          <a:ea typeface="Calibri"/>
-                        </a:rPr>
-                        <a:t>no API key, runs on CPU</a:t>
-                      </a:r>
-                      <a:endParaRPr lang="en-IN" sz="1250" b="0" u="none" strike="noStrike">
-                        <a:solidFill>
-                          <a:srgbClr val="000000"/>
-                        </a:solidFill>
-                        <a:effectLst/>
-                        <a:uFillTx/>
-                        <a:latin typeface="Arial"/>
-                      </a:endParaRPr>
-                    </a:p>
-                  </a:txBody>
-                  <a:tcPr anchor="ctr" marL="101520" marR="101520" marT="37800" marB="37800">
-                    <a:lnL w="12240">
-                      <a:solidFill>
-                        <a:srgbClr val="E2E8F0"/>
-                      </a:solidFill>
-                      <a:prstDash val="solid"/>
-                    </a:lnL>
-                    <a:lnR w="12240">
-                      <a:solidFill>
-                        <a:srgbClr val="E2E8F0"/>
-                      </a:solidFill>
-                      <a:prstDash val="solid"/>
-                    </a:lnR>
-                    <a:lnT w="12240">
-                      <a:solidFill>
-                        <a:srgbClr val="E2E8F0"/>
-                      </a:solidFill>
-                      <a:prstDash val="solid"/>
-                    </a:lnT>
-                    <a:lnB w="12240">
-                      <a:solidFill>
-                        <a:srgbClr val="E2E8F0"/>
-                      </a:solidFill>
-                      <a:prstDash val="solid"/>
-                    </a:lnB>
-                    <a:solidFill>
-                      <a:srgbClr val="FFFFFF"/>
-                    </a:solidFill>
-                  </a:tcPr>
-                </a:tc>
-              </a:tr>
             </a:tbl>
           </a:graphicData>
         </a:graphic>
@@ -10389,7 +10455,7 @@
                 <a:latin typeface="Calibri"/>
                 <a:ea typeface="Calibri"/>
               </a:rPr>
-              <a:t>It's basically free:  </a:t>
+              <a:t>Local is free, hosted is nearly free:  </a:t>
             </a:r>
             <a:r>
               <a:rPr lang="en-US" sz="1500" b="0" u="none" strike="noStrike">
@@ -10401,7 +10467,7 @@
                 <a:latin typeface="Calibri"/>
                 <a:ea typeface="Calibri"/>
               </a:rPr>
-              <a:t>at $0.02 per million tokens, embedding an entire novel costs under one rupee. </a:t>
+              <a:t>MiniLM costs nothing and runs on the Colab CPU; at $0.02 per million tokens, the hosted model embeds a whole novel for under a rupee. </a:t>
             </a:r>
             <a:r>
               <a:rPr lang="en-US" sz="1500" b="1" u="none" strike="noStrike">
@@ -10413,7 +10479,7 @@
                 <a:latin typeface="Calibri"/>
                 <a:ea typeface="Calibri"/>
               </a:rPr>
-              <a:t>Cost is never the reason not to index something.</a:t>
+              <a:t>Cost is never the reason not to index.</a:t>
             </a:r>
             <a:endParaRPr lang="en-IN" sz="1500" b="0" u="none" strike="noStrike">
               <a:solidFill>
@@ -11310,7 +11376,7 @@
                 <a:latin typeface="Calibri"/>
                 <a:ea typeface="Calibri"/>
               </a:rPr>
-              <a:t>no temperature, no answer — a different endpoint entirely</a:t>
+              <a:t>no temperature, no answer — model.encode() returns numbers</a:t>
             </a:r>
             <a:endParaRPr lang="en-IN" sz="1400" b="0" u="none" strike="noStrike">
               <a:solidFill>
@@ -13022,7 +13088,7 @@
                 <a:latin typeface="Courier New"/>
                 <a:ea typeface="Courier New"/>
               </a:rPr>
-              <a:t>def cosine(a, b):</a:t>
+              <a:t>from sklearn.metrics.pairwise import cosine_similarity</a:t>
             </a:r>
             <a:endParaRPr lang="en-IN" sz="1300" b="0" u="none" strike="noStrike">
               <a:solidFill>
@@ -13042,18 +13108,6 @@
                 <a:tab pos="0" algn="l"/>
               </a:tabLst>
             </a:pPr>
-            <a:r>
-              <a:rPr lang="en-US" sz="1300" b="0" u="none" strike="noStrike">
-                <a:solidFill>
-                  <a:srgbClr val="1E293B"/>
-                </a:solidFill>
-                <a:effectLst/>
-                <a:uFillTx/>
-                <a:latin typeface="Courier New"/>
-                <a:ea typeface="Courier New"/>
-              </a:rPr>
-              <a:t>    return np.dot(a, b) / (</a:t>
-            </a:r>
             <a:endParaRPr lang="en-IN" sz="1300" b="0" u="none" strike="noStrike">
               <a:solidFill>
                 <a:srgbClr val="000000"/>
@@ -13082,7 +13136,7 @@
                 <a:latin typeface="Courier New"/>
                 <a:ea typeface="Courier New"/>
               </a:rPr>
-              <a:t>        np.linalg.norm(a) * np.linalg.norm(b))</a:t>
+              <a:t>similarity_matrix = cosine_similarity(embeddings)</a:t>
             </a:r>
             <a:endParaRPr lang="en-IN" sz="1300" b="0" u="none" strike="noStrike">
               <a:solidFill>
@@ -13239,7 +13293,7 @@
                 <a:latin typeface="Calibri"/>
                 <a:ea typeface="Calibri"/>
               </a:rPr>
-              <a:t>dot product</a:t>
+              <a:t>one call</a:t>
             </a:r>
             <a:endParaRPr lang="en-IN" sz="1400" b="0" u="none" strike="noStrike">
               <a:solidFill>
@@ -13261,7 +13315,7 @@
         <p:spPr>
           <a:xfrm>
             <a:off x="8549640" y="1965960"/>
-            <a:ext cx="2834280" cy="456840"/>
+            <a:ext cx="2834280" cy="548280"/>
           </a:xfrm>
           <a:prstGeom prst="rect">
             <a:avLst/>
@@ -13300,7 +13354,7 @@
                 <a:latin typeface="Calibri"/>
                 <a:ea typeface="Calibri"/>
               </a:rPr>
-              <a:t>multiply pairwise, add it up</a:t>
+              <a:t>the whole matrix — every text vs every text</a:t>
             </a:r>
             <a:endParaRPr lang="en-IN" sz="1300" b="0" u="none" strike="noStrike">
               <a:solidFill>
@@ -13321,7 +13375,7 @@
         </p:nvSpPr>
         <p:spPr>
           <a:xfrm>
-            <a:off x="8549640" y="2560320"/>
+            <a:off x="8549640" y="2651760"/>
             <a:ext cx="2834280" cy="365400"/>
           </a:xfrm>
           <a:prstGeom prst="rect">
@@ -13361,7 +13415,7 @@
                 <a:latin typeface="Calibri"/>
                 <a:ea typeface="Calibri"/>
               </a:rPr>
-              <a:t>norm</a:t>
+              <a:t>the diagonal</a:t>
             </a:r>
             <a:endParaRPr lang="en-IN" sz="1400" b="0" u="none" strike="noStrike">
               <a:solidFill>
@@ -13382,8 +13436,8 @@
         </p:nvSpPr>
         <p:spPr>
           <a:xfrm>
-            <a:off x="8549640" y="2880360"/>
-            <a:ext cx="2834280" cy="456840"/>
+            <a:off x="8549640" y="2971800"/>
+            <a:ext cx="2834280" cy="548280"/>
           </a:xfrm>
           <a:prstGeom prst="rect">
             <a:avLst/>
@@ -13422,7 +13476,7 @@
                 <a:latin typeface="Calibri"/>
                 <a:ea typeface="Calibri"/>
               </a:rPr>
-              <a:t>the length of the vector</a:t>
+              <a:t>always 1.000 — each text vs itself</a:t>
             </a:r>
             <a:endParaRPr lang="en-IN" sz="1300" b="0" u="none" strike="noStrike">
               <a:solidFill>
@@ -13881,16 +13935,16 @@
               </a:tabLst>
             </a:pPr>
             <a:r>
-              <a:rPr lang="en-US" sz="1500" b="0" u="none" strike="noStrike">
-                <a:solidFill>
-                  <a:srgbClr val="1E293B"/>
-                </a:solidFill>
-                <a:effectLst/>
-                <a:uFillTx/>
-                <a:latin typeface="Courier New"/>
-                <a:ea typeface="Courier New"/>
-              </a:rPr>
-              <a:t>Query:  “How do I cancel my order?”</a:t>
+              <a:rPr lang="en-US" sz="1500" b="0" i="1" u="none" strike="noStrike">
+                <a:solidFill>
+                  <a:srgbClr val="64748B"/>
+                </a:solidFill>
+                <a:effectLst/>
+                <a:uFillTx/>
+                <a:latin typeface="Calibri"/>
+                <a:ea typeface="Calibri"/>
+              </a:rPr>
+              <a:t>Four sentences in, one similarity matrix out:</a:t>
             </a:r>
             <a:endParaRPr lang="en-IN" sz="1500" b="0" u="none" strike="noStrike">
               <a:solidFill>
@@ -13911,7 +13965,7 @@
         </p:nvGraphicFramePr>
         <p:xfrm>
           <a:off x="548640" y="1737360"/>
-          <a:ext cx="11091240" cy="2834280"/>
+          <a:ext cx="11091240" cy="3108960"/>
         </p:xfrm>
         <a:graphic>
           <a:graphicData uri="http://schemas.openxmlformats.org/drawingml/2006/table">
@@ -13922,7 +13976,7 @@
                 <a:gridCol w="2560320"/>
                 <a:gridCol w="2496240"/>
               </a:tblGrid>
-              <a:tr h="566640">
+              <a:tr h="777240">
                 <a:tc>
                   <a:txBody>
                     <a:bodyPr lIns="101520" tIns="37800" rIns="101520" bIns="37800" anchor="ctr">
@@ -13947,7 +14001,73 @@
                           <a:latin typeface="Calibri"/>
                           <a:ea typeface="Calibri"/>
                         </a:rPr>
-                        <a:t>Compared against</a:t>
+                        <a:t>Compared</a:t>
+                      </a:r>
+                      <a:endParaRPr lang="en-IN" sz="1300" b="0" u="none" strike="noStrike">
+                        <a:solidFill>
+                          <a:srgbClr val="FFFFFF"/>
+                        </a:solidFill>
+                        <a:effectLst/>
+                        <a:uFillTx/>
+                        <a:latin typeface="Arial"/>
+                      </a:endParaRPr>
+                    </a:p>
+                  </a:txBody>
+                  <a:tcPr anchor="ctr" marL="101520" marR="101520" marT="37800" marB="37800">
+                    <a:lnL w="12240">
+                      <a:solidFill>
+                        <a:srgbClr val="E2E8F0"/>
+                      </a:solidFill>
+                      <a:prstDash val="solid"/>
+                    </a:lnL>
+                    <a:lnR w="12240">
+                      <a:solidFill>
+                        <a:srgbClr val="E2E8F0"/>
+                      </a:solidFill>
+                      <a:prstDash val="solid"/>
+                    </a:lnR>
+                    <a:lnT w="12240">
+                      <a:solidFill>
+                        <a:srgbClr val="E2E8F0"/>
+                      </a:solidFill>
+                      <a:prstDash val="solid"/>
+                    </a:lnT>
+                    <a:lnB w="12240">
+                      <a:solidFill>
+                        <a:srgbClr val="E2E8F0"/>
+                      </a:solidFill>
+                      <a:prstDash val="solid"/>
+                    </a:lnB>
+                    <a:solidFill>
+                      <a:srgbClr val="1E293B"/>
+                    </a:solidFill>
+                  </a:tcPr>
+                </a:tc>
+                <a:tc>
+                  <a:txBody>
+                    <a:bodyPr lIns="101520" tIns="37800" rIns="101520" bIns="37800" anchor="ctr">
+                      <a:noAutofit/>
+                    </a:bodyPr>
+                    <a:p>
+                      <a:pPr defTabSz="914400">
+                        <a:lnSpc>
+                          <a:spcPct val="100000"/>
+                        </a:lnSpc>
+                        <a:tabLst>
+                          <a:tab pos="0" algn="l"/>
+                        </a:tabLst>
+                      </a:pPr>
+                      <a:r>
+                        <a:rPr lang="en-US" sz="1300" b="1" u="none" strike="noStrike">
+                          <a:solidFill>
+                            <a:srgbClr val="FFFFFF"/>
+                          </a:solidFill>
+                          <a:effectLst/>
+                          <a:uFillTx/>
+                          <a:latin typeface="Calibri"/>
+                          <a:ea typeface="Calibri"/>
+                        </a:rPr>
+                        <a:t>Shared words</a:t>
                       </a:r>
                       <a:endParaRPr lang="en-IN" sz="1300" b="0" u="none" strike="noStrike">
                         <a:solidFill>
@@ -14055,6 +14175,8 @@
                     </a:solidFill>
                   </a:tcPr>
                 </a:tc>
+              </a:tr>
+              <a:tr h="777240">
                 <a:tc>
                   <a:txBody>
                     <a:bodyPr lIns="101520" tIns="37800" rIns="101520" bIns="37800" anchor="ctr">
@@ -14070,20 +14192,50 @@
                         </a:tabLst>
                       </a:pPr>
                       <a:r>
-                        <a:rPr lang="en-US" sz="1300" b="1" u="none" strike="noStrike">
+                        <a:rPr lang="en-US" sz="1250" b="0" u="none" strike="noStrike">
                           <a:solidFill>
-                            <a:srgbClr val="FFFFFF"/>
+                            <a:srgbClr val="1E293B"/>
                           </a:solidFill>
                           <a:effectLst/>
                           <a:uFillTx/>
                           <a:latin typeface="Calibri"/>
                           <a:ea typeface="Calibri"/>
                         </a:rPr>
-                        <a:t>Shared words</a:t>
+                        <a:t>“Machine learning is a branch of AI”  vs</a:t>
                       </a:r>
-                      <a:endParaRPr lang="en-IN" sz="1300" b="0" u="none" strike="noStrike">
+                      <a:endParaRPr lang="en-IN" sz="1250" b="0" u="none" strike="noStrike">
                         <a:solidFill>
-                          <a:srgbClr val="FFFFFF"/>
+                          <a:srgbClr val="000000"/>
+                        </a:solidFill>
+                        <a:effectLst/>
+                        <a:uFillTx/>
+                        <a:latin typeface="Arial"/>
+                      </a:endParaRPr>
+                    </a:p>
+                    <a:p>
+                      <a:pPr defTabSz="914400">
+                        <a:lnSpc>
+                          <a:spcPct val="100000"/>
+                        </a:lnSpc>
+                        <a:tabLst>
+                          <a:tab pos="0" algn="l"/>
+                        </a:tabLst>
+                      </a:pPr>
+                      <a:r>
+                        <a:rPr lang="en-US" sz="1250" b="0" u="none" strike="noStrike">
+                          <a:solidFill>
+                            <a:srgbClr val="1E293B"/>
+                          </a:solidFill>
+                          <a:effectLst/>
+                          <a:uFillTx/>
+                          <a:latin typeface="Calibri"/>
+                          <a:ea typeface="Calibri"/>
+                        </a:rPr>
+                        <a:t>“Deep learning uses neural networks”</a:t>
+                      </a:r>
+                      <a:endParaRPr lang="en-IN" sz="1250" b="0" u="none" strike="noStrike">
+                        <a:solidFill>
+                          <a:srgbClr val="000000"/>
                         </a:solidFill>
                         <a:effectLst/>
                         <a:uFillTx/>
@@ -14117,12 +14269,10 @@
                       <a:prstDash val="solid"/>
                     </a:lnB>
                     <a:solidFill>
-                      <a:srgbClr val="1E293B"/>
+                      <a:srgbClr val="FFFFFF"/>
                     </a:solidFill>
                   </a:tcPr>
                 </a:tc>
-              </a:tr>
-              <a:tr h="566640">
                 <a:tc>
                   <a:txBody>
                     <a:bodyPr lIns="101520" tIns="37800" rIns="101520" bIns="37800" anchor="ctr">
@@ -14140,14 +14290,14 @@
                       <a:r>
                         <a:rPr lang="en-US" sz="1250" b="0" u="none" strike="noStrike">
                           <a:solidFill>
-                            <a:srgbClr val="1E293B"/>
+                            <a:srgbClr val="B91C1C"/>
                           </a:solidFill>
                           <a:effectLst/>
                           <a:uFillTx/>
                           <a:latin typeface="Calibri"/>
                           <a:ea typeface="Calibri"/>
                         </a:rPr>
-                        <a:t>“What is your return policy?”</a:t>
+                        <a:t>almost none</a:t>
                       </a:r>
                       <a:endParaRPr lang="en-IN" sz="1250" b="0" u="none" strike="noStrike">
                         <a:solidFill>
@@ -14213,73 +14363,7 @@
                           <a:latin typeface="Calibri"/>
                           <a:ea typeface="Calibri"/>
                         </a:rPr>
-                        <a:t>0.62</a:t>
-                      </a:r>
-                      <a:endParaRPr lang="en-IN" sz="1250" b="0" u="none" strike="noStrike">
-                        <a:solidFill>
-                          <a:srgbClr val="000000"/>
-                        </a:solidFill>
-                        <a:effectLst/>
-                        <a:uFillTx/>
-                        <a:latin typeface="Arial"/>
-                      </a:endParaRPr>
-                    </a:p>
-                  </a:txBody>
-                  <a:tcPr anchor="ctr" marL="101520" marR="101520" marT="37800" marB="37800">
-                    <a:lnL w="12240">
-                      <a:solidFill>
-                        <a:srgbClr val="E2E8F0"/>
-                      </a:solidFill>
-                      <a:prstDash val="solid"/>
-                    </a:lnL>
-                    <a:lnR w="12240">
-                      <a:solidFill>
-                        <a:srgbClr val="E2E8F0"/>
-                      </a:solidFill>
-                      <a:prstDash val="solid"/>
-                    </a:lnR>
-                    <a:lnT w="12240">
-                      <a:solidFill>
-                        <a:srgbClr val="E2E8F0"/>
-                      </a:solidFill>
-                      <a:prstDash val="solid"/>
-                    </a:lnT>
-                    <a:lnB w="12240">
-                      <a:solidFill>
-                        <a:srgbClr val="E2E8F0"/>
-                      </a:solidFill>
-                      <a:prstDash val="solid"/>
-                    </a:lnB>
-                    <a:solidFill>
-                      <a:srgbClr val="FFFFFF"/>
-                    </a:solidFill>
-                  </a:tcPr>
-                </a:tc>
-                <a:tc>
-                  <a:txBody>
-                    <a:bodyPr lIns="101520" tIns="37800" rIns="101520" bIns="37800" anchor="ctr">
-                      <a:noAutofit/>
-                    </a:bodyPr>
-                    <a:p>
-                      <a:pPr defTabSz="914400">
-                        <a:lnSpc>
-                          <a:spcPct val="100000"/>
-                        </a:lnSpc>
-                        <a:tabLst>
-                          <a:tab pos="0" algn="l"/>
-                        </a:tabLst>
-                      </a:pPr>
-                      <a:r>
-                        <a:rPr lang="en-US" sz="1250" b="0" u="none" strike="noStrike">
-                          <a:solidFill>
-                            <a:srgbClr val="B91C1C"/>
-                          </a:solidFill>
-                          <a:effectLst/>
-                          <a:uFillTx/>
-                          <a:latin typeface="Calibri"/>
-                          <a:ea typeface="Calibri"/>
-                        </a:rPr>
-                        <a:t>none</a:t>
+                        <a:t>HIGH — same topic</a:t>
                       </a:r>
                       <a:endParaRPr lang="en-IN" sz="1250" b="0" u="none" strike="noStrike">
                         <a:solidFill>
@@ -14322,7 +14406,7 @@
                   </a:tcPr>
                 </a:tc>
               </a:tr>
-              <a:tr h="566640">
+              <a:tr h="777240">
                 <a:tc>
                   <a:txBody>
                     <a:bodyPr lIns="101520" tIns="37800" rIns="101520" bIns="37800" anchor="ctr">
@@ -14347,273 +14431,7 @@
                           <a:latin typeface="Calibri"/>
                           <a:ea typeface="Calibri"/>
                         </a:rPr>
-                        <a:t>“I want to send this item back”</a:t>
-                      </a:r>
-                      <a:endParaRPr lang="en-IN" sz="1250" b="0" u="none" strike="noStrike">
-                        <a:solidFill>
-                          <a:srgbClr val="000000"/>
-                        </a:solidFill>
-                        <a:effectLst/>
-                        <a:uFillTx/>
-                        <a:latin typeface="Arial"/>
-                      </a:endParaRPr>
-                    </a:p>
-                  </a:txBody>
-                  <a:tcPr anchor="ctr" marL="101520" marR="101520" marT="37800" marB="37800">
-                    <a:lnL w="12240">
-                      <a:solidFill>
-                        <a:srgbClr val="E2E8F0"/>
-                      </a:solidFill>
-                      <a:prstDash val="solid"/>
-                    </a:lnL>
-                    <a:lnR w="12240">
-                      <a:solidFill>
-                        <a:srgbClr val="E2E8F0"/>
-                      </a:solidFill>
-                      <a:prstDash val="solid"/>
-                    </a:lnR>
-                    <a:lnT w="12240">
-                      <a:solidFill>
-                        <a:srgbClr val="E2E8F0"/>
-                      </a:solidFill>
-                      <a:prstDash val="solid"/>
-                    </a:lnT>
-                    <a:lnB w="12240">
-                      <a:solidFill>
-                        <a:srgbClr val="E2E8F0"/>
-                      </a:solidFill>
-                      <a:prstDash val="solid"/>
-                    </a:lnB>
-                    <a:solidFill>
-                      <a:srgbClr val="FFFFFF"/>
-                    </a:solidFill>
-                  </a:tcPr>
-                </a:tc>
-                <a:tc>
-                  <a:txBody>
-                    <a:bodyPr lIns="101520" tIns="37800" rIns="101520" bIns="37800" anchor="ctr">
-                      <a:noAutofit/>
-                    </a:bodyPr>
-                    <a:p>
-                      <a:pPr defTabSz="914400">
-                        <a:lnSpc>
-                          <a:spcPct val="100000"/>
-                        </a:lnSpc>
-                        <a:tabLst>
-                          <a:tab pos="0" algn="l"/>
-                        </a:tabLst>
-                      </a:pPr>
-                      <a:r>
-                        <a:rPr lang="en-US" sz="1250" b="0" u="none" strike="noStrike">
-                          <a:solidFill>
-                            <a:srgbClr val="15803D"/>
-                          </a:solidFill>
-                          <a:effectLst/>
-                          <a:uFillTx/>
-                          <a:latin typeface="Calibri"/>
-                          <a:ea typeface="Calibri"/>
-                        </a:rPr>
-                        <a:t>0.58</a:t>
-                      </a:r>
-                      <a:endParaRPr lang="en-IN" sz="1250" b="0" u="none" strike="noStrike">
-                        <a:solidFill>
-                          <a:srgbClr val="000000"/>
-                        </a:solidFill>
-                        <a:effectLst/>
-                        <a:uFillTx/>
-                        <a:latin typeface="Arial"/>
-                      </a:endParaRPr>
-                    </a:p>
-                  </a:txBody>
-                  <a:tcPr anchor="ctr" marL="101520" marR="101520" marT="37800" marB="37800">
-                    <a:lnL w="12240">
-                      <a:solidFill>
-                        <a:srgbClr val="E2E8F0"/>
-                      </a:solidFill>
-                      <a:prstDash val="solid"/>
-                    </a:lnL>
-                    <a:lnR w="12240">
-                      <a:solidFill>
-                        <a:srgbClr val="E2E8F0"/>
-                      </a:solidFill>
-                      <a:prstDash val="solid"/>
-                    </a:lnR>
-                    <a:lnT w="12240">
-                      <a:solidFill>
-                        <a:srgbClr val="E2E8F0"/>
-                      </a:solidFill>
-                      <a:prstDash val="solid"/>
-                    </a:lnT>
-                    <a:lnB w="12240">
-                      <a:solidFill>
-                        <a:srgbClr val="E2E8F0"/>
-                      </a:solidFill>
-                      <a:prstDash val="solid"/>
-                    </a:lnB>
-                    <a:solidFill>
-                      <a:srgbClr val="FFFFFF"/>
-                    </a:solidFill>
-                  </a:tcPr>
-                </a:tc>
-                <a:tc>
-                  <a:txBody>
-                    <a:bodyPr lIns="101520" tIns="37800" rIns="101520" bIns="37800" anchor="ctr">
-                      <a:noAutofit/>
-                    </a:bodyPr>
-                    <a:p>
-                      <a:pPr defTabSz="914400">
-                        <a:lnSpc>
-                          <a:spcPct val="100000"/>
-                        </a:lnSpc>
-                        <a:tabLst>
-                          <a:tab pos="0" algn="l"/>
-                        </a:tabLst>
-                      </a:pPr>
-                      <a:r>
-                        <a:rPr lang="en-US" sz="1250" b="0" u="none" strike="noStrike">
-                          <a:solidFill>
-                            <a:srgbClr val="B91C1C"/>
-                          </a:solidFill>
-                          <a:effectLst/>
-                          <a:uFillTx/>
-                          <a:latin typeface="Calibri"/>
-                          <a:ea typeface="Calibri"/>
-                        </a:rPr>
-                        <a:t>none</a:t>
-                      </a:r>
-                      <a:endParaRPr lang="en-IN" sz="1250" b="0" u="none" strike="noStrike">
-                        <a:solidFill>
-                          <a:srgbClr val="000000"/>
-                        </a:solidFill>
-                        <a:effectLst/>
-                        <a:uFillTx/>
-                        <a:latin typeface="Arial"/>
-                      </a:endParaRPr>
-                    </a:p>
-                  </a:txBody>
-                  <a:tcPr anchor="ctr" marL="101520" marR="101520" marT="37800" marB="37800">
-                    <a:lnL w="12240">
-                      <a:solidFill>
-                        <a:srgbClr val="E2E8F0"/>
-                      </a:solidFill>
-                      <a:prstDash val="solid"/>
-                    </a:lnL>
-                    <a:lnR w="12240">
-                      <a:solidFill>
-                        <a:srgbClr val="E2E8F0"/>
-                      </a:solidFill>
-                      <a:prstDash val="solid"/>
-                    </a:lnR>
-                    <a:lnT w="12240">
-                      <a:solidFill>
-                        <a:srgbClr val="E2E8F0"/>
-                      </a:solidFill>
-                      <a:prstDash val="solid"/>
-                    </a:lnT>
-                    <a:lnB w="12240">
-                      <a:solidFill>
-                        <a:srgbClr val="E2E8F0"/>
-                      </a:solidFill>
-                      <a:prstDash val="solid"/>
-                    </a:lnB>
-                    <a:solidFill>
-                      <a:srgbClr val="FFFFFF"/>
-                    </a:solidFill>
-                  </a:tcPr>
-                </a:tc>
-              </a:tr>
-              <a:tr h="566640">
-                <a:tc>
-                  <a:txBody>
-                    <a:bodyPr lIns="101520" tIns="37800" rIns="101520" bIns="37800" anchor="ctr">
-                      <a:noAutofit/>
-                    </a:bodyPr>
-                    <a:p>
-                      <a:pPr defTabSz="914400">
-                        <a:lnSpc>
-                          <a:spcPct val="100000"/>
-                        </a:lnSpc>
-                        <a:tabLst>
-                          <a:tab pos="0" algn="l"/>
-                        </a:tabLst>
-                      </a:pPr>
-                      <a:r>
-                        <a:rPr lang="en-US" sz="1250" b="0" u="none" strike="noStrike">
-                          <a:solidFill>
-                            <a:srgbClr val="1E293B"/>
-                          </a:solidFill>
-                          <a:effectLst/>
-                          <a:uFillTx/>
-                          <a:latin typeface="Calibri"/>
-                          <a:ea typeface="Calibri"/>
-                        </a:rPr>
-                        <a:t>“Our office is open 9am to 6pm”</a:t>
-                      </a:r>
-                      <a:endParaRPr lang="en-IN" sz="1250" b="0" u="none" strike="noStrike">
-                        <a:solidFill>
-                          <a:srgbClr val="000000"/>
-                        </a:solidFill>
-                        <a:effectLst/>
-                        <a:uFillTx/>
-                        <a:latin typeface="Arial"/>
-                      </a:endParaRPr>
-                    </a:p>
-                  </a:txBody>
-                  <a:tcPr anchor="ctr" marL="101520" marR="101520" marT="37800" marB="37800">
-                    <a:lnL w="12240">
-                      <a:solidFill>
-                        <a:srgbClr val="E2E8F0"/>
-                      </a:solidFill>
-                      <a:prstDash val="solid"/>
-                    </a:lnL>
-                    <a:lnR w="12240">
-                      <a:solidFill>
-                        <a:srgbClr val="E2E8F0"/>
-                      </a:solidFill>
-                      <a:prstDash val="solid"/>
-                    </a:lnR>
-                    <a:lnT w="12240">
-                      <a:solidFill>
-                        <a:srgbClr val="E2E8F0"/>
-                      </a:solidFill>
-                      <a:prstDash val="solid"/>
-                    </a:lnT>
-                    <a:lnB w="12240">
-                      <a:solidFill>
-                        <a:srgbClr val="E2E8F0"/>
-                      </a:solidFill>
-                      <a:prstDash val="solid"/>
-                    </a:lnB>
-                    <a:solidFill>
-                      <a:srgbClr val="FFFFFF"/>
-                    </a:solidFill>
-                  </a:tcPr>
-                </a:tc>
-                <a:tc>
-                  <a:txBody>
-                    <a:bodyPr lIns="101520" tIns="37800" rIns="101520" bIns="37800" anchor="ctr">
-                      <a:noAutofit/>
-                    </a:bodyPr>
-                    <a:p>
-                      <a:pPr defTabSz="914400">
-                        <a:lnSpc>
-                          <a:spcPct val="100000"/>
-                        </a:lnSpc>
-                        <a:tabLst>
-                          <a:tab pos="0" algn="l"/>
-                        </a:tabLst>
-                      </a:pPr>
-                      <a:r>
-                        <a:rPr lang="en-US" sz="1250" b="0" u="none" strike="noStrike">
-                          <a:solidFill>
-                            <a:srgbClr val="64748B"/>
-                          </a:solidFill>
-                          <a:effectLst/>
-                          <a:uFillTx/>
-                          <a:latin typeface="Calibri"/>
-                          <a:ea typeface="Calibri"/>
-                        </a:rPr>
-                        <a:t>0.11</a:t>
+                        <a:t>“Machine learning…”  vs  “I love cooking Indian food”</a:t>
                       </a:r>
                       <a:endParaRPr lang="en-IN" sz="1250" b="0" u="none" strike="noStrike">
                         <a:solidFill>
@@ -14721,8 +14539,6 @@
                     </a:solidFill>
                   </a:tcPr>
                 </a:tc>
-              </a:tr>
-              <a:tr h="566640">
                 <a:tc>
                   <a:txBody>
                     <a:bodyPr lIns="101520" tIns="37800" rIns="101520" bIns="37800" anchor="ctr">
@@ -14740,14 +14556,14 @@
                       <a:r>
                         <a:rPr lang="en-US" sz="1250" b="0" u="none" strike="noStrike">
                           <a:solidFill>
-                            <a:srgbClr val="1E293B"/>
+                            <a:srgbClr val="64748B"/>
                           </a:solidFill>
                           <a:effectLst/>
                           <a:uFillTx/>
                           <a:latin typeface="Calibri"/>
                           <a:ea typeface="Calibri"/>
                         </a:rPr>
-                        <a:t>“The Eiffel Tower is in Paris.”</a:t>
+                        <a:t>near zero</a:t>
                       </a:r>
                       <a:endParaRPr lang="en-IN" sz="1250" b="0" u="none" strike="noStrike">
                         <a:solidFill>
@@ -14789,6 +14605,8 @@
                     </a:solidFill>
                   </a:tcPr>
                 </a:tc>
+              </a:tr>
+              <a:tr h="777240">
                 <a:tc>
                   <a:txBody>
                     <a:bodyPr lIns="101520" tIns="37800" rIns="101520" bIns="37800" anchor="ctr">
@@ -14806,14 +14624,14 @@
                       <a:r>
                         <a:rPr lang="en-US" sz="1250" b="0" u="none" strike="noStrike">
                           <a:solidFill>
-                            <a:srgbClr val="64748B"/>
+                            <a:srgbClr val="1E293B"/>
                           </a:solidFill>
                           <a:effectLst/>
                           <a:uFillTx/>
                           <a:latin typeface="Calibri"/>
                           <a:ea typeface="Calibri"/>
                         </a:rPr>
-                        <a:t>0.04</a:t>
+                        <a:t>“Machine learning…”  vs  “Cricket is popular in India”</a:t>
                       </a:r>
                       <a:endParaRPr lang="en-IN" sz="1250" b="0" u="none" strike="noStrike">
                         <a:solidFill>
@@ -14921,6 +14739,72 @@
                     </a:solidFill>
                   </a:tcPr>
                 </a:tc>
+                <a:tc>
+                  <a:txBody>
+                    <a:bodyPr lIns="101520" tIns="37800" rIns="101520" bIns="37800" anchor="ctr">
+                      <a:noAutofit/>
+                    </a:bodyPr>
+                    <a:p>
+                      <a:pPr defTabSz="914400">
+                        <a:lnSpc>
+                          <a:spcPct val="100000"/>
+                        </a:lnSpc>
+                        <a:tabLst>
+                          <a:tab pos="0" algn="l"/>
+                        </a:tabLst>
+                      </a:pPr>
+                      <a:r>
+                        <a:rPr lang="en-US" sz="1250" b="0" u="none" strike="noStrike">
+                          <a:solidFill>
+                            <a:srgbClr val="64748B"/>
+                          </a:solidFill>
+                          <a:effectLst/>
+                          <a:uFillTx/>
+                          <a:latin typeface="Calibri"/>
+                          <a:ea typeface="Calibri"/>
+                        </a:rPr>
+                        <a:t>near zero</a:t>
+                      </a:r>
+                      <a:endParaRPr lang="en-IN" sz="1250" b="0" u="none" strike="noStrike">
+                        <a:solidFill>
+                          <a:srgbClr val="000000"/>
+                        </a:solidFill>
+                        <a:effectLst/>
+                        <a:uFillTx/>
+                        <a:latin typeface="Arial"/>
+                      </a:endParaRPr>
+                    </a:p>
+                  </a:txBody>
+                  <a:tcPr anchor="ctr" marL="101520" marR="101520" marT="37800" marB="37800">
+                    <a:lnL w="12240">
+                      <a:solidFill>
+                        <a:srgbClr val="E2E8F0"/>
+                      </a:solidFill>
+                      <a:prstDash val="solid"/>
+                    </a:lnL>
+                    <a:lnR w="12240">
+                      <a:solidFill>
+                        <a:srgbClr val="E2E8F0"/>
+                      </a:solidFill>
+                      <a:prstDash val="solid"/>
+                    </a:lnR>
+                    <a:lnT w="12240">
+                      <a:solidFill>
+                        <a:srgbClr val="E2E8F0"/>
+                      </a:solidFill>
+                      <a:prstDash val="solid"/>
+                    </a:lnT>
+                    <a:lnB w="12240">
+                      <a:solidFill>
+                        <a:srgbClr val="E2E8F0"/>
+                      </a:solidFill>
+                      <a:prstDash val="solid"/>
+                    </a:lnB>
+                    <a:solidFill>
+                      <a:srgbClr val="FFFFFF"/>
+                    </a:solidFill>
+                  </a:tcPr>
+                </a:tc>
               </a:tr>
             </a:tbl>
           </a:graphicData>
@@ -15083,7 +14967,7 @@
                 <a:latin typeface="Calibri"/>
                 <a:ea typeface="Calibri"/>
               </a:rPr>
-              <a:t>Zero shared words with the top hit —</a:t>
+              <a:t>The ML/DL pair shares almost no words —</a:t>
             </a:r>
             <a:endParaRPr lang="en-IN" sz="1400" b="0" u="none" strike="noStrike">
               <a:solidFill>
@@ -15113,7 +14997,7 @@
                 <a:latin typeface="Calibri"/>
                 <a:ea typeface="Calibri"/>
               </a:rPr>
-              <a:t>and it still beats the unrelated one by 15×.</a:t>
+              <a:t>and still scores far above cooking and cricket.</a:t>
             </a:r>
             <a:endParaRPr lang="en-IN" sz="1400" b="0" u="none" strike="noStrike">
               <a:solidFill>
@@ -18196,7 +18080,7 @@
                 <a:latin typeface="Calibri"/>
                 <a:ea typeface="Calibri"/>
               </a:rPr>
-              <a:t>Cut every 140 characters, no overlap:</a:t>
+              <a:t>Hand-rolled chunker — slice every 200 characters:</a:t>
             </a:r>
             <a:endParaRPr lang="en-IN" sz="1500" b="0" u="none" strike="noStrike">
               <a:solidFill>
@@ -18305,7 +18189,7 @@
                 <a:latin typeface="Calibri"/>
                 <a:ea typeface="Calibri"/>
               </a:rPr>
-              <a:t>chunk 0</a:t>
+              <a:t>chunk 2</a:t>
             </a:r>
             <a:endParaRPr lang="en-IN" sz="1200" b="0" u="none" strike="noStrike">
               <a:solidFill>
@@ -18366,7 +18250,7 @@
                 <a:latin typeface="Courier New"/>
                 <a:ea typeface="Courier New"/>
               </a:rPr>
-              <a:t>“… You can track your shipment using the link sent to your email. The refund window is 3</a:t>
+              <a:t>“… won the Women in Tech Leader award in 2022. Rahul Verma is the CT</a:t>
             </a:r>
             <a:endParaRPr lang="en-IN" sz="1250" b="0" u="none" strike="noStrike">
               <a:solidFill>
@@ -18427,7 +18311,7 @@
                 <a:latin typeface="Calibri"/>
                 <a:ea typeface="Calibri"/>
               </a:rPr>
-              <a:t>chunk 1</a:t>
+              <a:t>chunk 3</a:t>
             </a:r>
             <a:endParaRPr lang="en-IN" sz="1200" b="0" u="none" strike="noStrike">
               <a:solidFill>
@@ -18488,7 +18372,7 @@
                 <a:latin typeface="Courier New"/>
                 <a:ea typeface="Courier New"/>
               </a:rPr>
-              <a:t>“0 days from the date of delivery. Refunds are credited to the original payment method …</a:t>
+              <a:t>“O and co-founder. He graduated from BITS Pilani and previously worked …</a:t>
             </a:r>
             <a:endParaRPr lang="en-IN" sz="1250" b="0" u="none" strike="noStrike">
               <a:solidFill>
@@ -18549,7 +18433,7 @@
                 <a:latin typeface="Calibri"/>
                 <a:ea typeface="Calibri"/>
               </a:rPr>
-              <a:t>The chunker sliced the number 30 straight down the middle.</a:t>
+              <a:t>It sliced CTO straight down the middle.</a:t>
             </a:r>
             <a:endParaRPr lang="en-IN" sz="1400" b="0" u="none" strike="noStrike">
               <a:solidFill>
@@ -18610,7 +18494,7 @@
                 <a:latin typeface="Calibri"/>
                 <a:ea typeface="Calibri"/>
               </a:rPr>
-              <a:t>Ask “how many days do I have to return an item?” — one chunk says the window is “3”, the other opens with a stray “0”.</a:t>
+              <a:t>Ask “who is the CTO?” — the word CTO now exists in no chunk at all. One ends in “CT”, the next opens with a stray “O”.</a:t>
             </a:r>
             <a:endParaRPr lang="en-IN" sz="1500" b="0" u="none" strike="noStrike">
               <a:solidFill>
@@ -18679,8 +18563,8 @@
         </p:nvSpPr>
         <p:spPr>
           <a:xfrm>
-            <a:off x="868680" y="4251960"/>
-            <a:ext cx="2377080" cy="319680"/>
+            <a:off x="868680" y="4224600"/>
+            <a:ext cx="7314840" cy="347040"/>
           </a:xfrm>
           <a:prstGeom prst="rect">
             <a:avLst/>
@@ -18716,10 +18600,10 @@
                 </a:solidFill>
                 <a:effectLst/>
                 <a:uFillTx/>
-                <a:latin typeface="Calibri"/>
-                <a:ea typeface="Calibri"/>
-              </a:rPr>
-              <a:t>With overlap=40</a:t>
+                <a:latin typeface="Courier New"/>
+                <a:ea typeface="Courier New"/>
+              </a:rPr>
+              <a:t>RecursiveCharacterTextSplitter(chunk_size=200, chunk_overlap=50)</a:t>
             </a:r>
             <a:endParaRPr lang="en-IN" sz="1200" b="0" u="none" strike="noStrike">
               <a:solidFill>
@@ -18780,7 +18664,7 @@
                 <a:latin typeface="Courier New"/>
                 <a:ea typeface="Courier New"/>
               </a:rPr>
-              <a:t>“… sent to your email. The refund window is 30 days from the date of delivery. Refunds are …”</a:t>
+              <a:t>“… award in 2022. Rahul Verma is the CTO and co-founder. He graduated from BITS Pilani …”</a:t>
             </a:r>
             <a:endParaRPr lang="en-IN" sz="1250" b="0" u="none" strike="noStrike">
               <a:solidFill>
@@ -18841,7 +18725,7 @@
                 <a:latin typeface="Calibri"/>
                 <a:ea typeface="Calibri"/>
               </a:rPr>
-              <a:t>The whole fact survives in one chunk. Nothing changed but the boundaries.</a:t>
+              <a:t>Breaks on paragraph → sentence → word. The fact survives whole. Nothing changed but the boundaries.</a:t>
             </a:r>
             <a:endParaRPr lang="en-IN" sz="1400" b="0" u="none" strike="noStrike">
               <a:solidFill>
@@ -23770,7 +23654,7 @@
               </a:tabLst>
             </a:pPr>
             <a:r>
-              <a:rPr lang="en-US" sz="1250" b="0" u="none" strike="noStrike">
+              <a:rPr lang="en-US" sz="1200" b="0" u="none" strike="noStrike">
                 <a:solidFill>
                   <a:srgbClr val="1E293B"/>
                 </a:solidFill>
@@ -23781,7 +23665,7 @@
               </a:rPr>
               <a:t>import chromadb</a:t>
             </a:r>
-            <a:endParaRPr lang="en-IN" sz="1250" b="0" u="none" strike="noStrike">
+            <a:endParaRPr lang="en-IN" sz="1200" b="0" u="none" strike="noStrike">
               <a:solidFill>
                 <a:srgbClr val="000000"/>
               </a:solidFill>
@@ -23799,7 +23683,7 @@
                 <a:tab pos="0" algn="l"/>
               </a:tabLst>
             </a:pPr>
-            <a:endParaRPr lang="en-IN" sz="1250" b="0" u="none" strike="noStrike">
+            <a:endParaRPr lang="en-IN" sz="1200" b="0" u="none" strike="noStrike">
               <a:solidFill>
                 <a:srgbClr val="000000"/>
               </a:solidFill>
@@ -23818,7 +23702,7 @@
               </a:tabLst>
             </a:pPr>
             <a:r>
-              <a:rPr lang="en-US" sz="1250" b="0" u="none" strike="noStrike">
+              <a:rPr lang="en-US" sz="1200" b="0" u="none" strike="noStrike">
                 <a:solidFill>
                   <a:srgbClr val="1E293B"/>
                 </a:solidFill>
@@ -23827,9 +23711,9 @@
                 <a:latin typeface="Courier New"/>
                 <a:ea typeface="Courier New"/>
               </a:rPr>
-              <a:t>db  = chromadb.Client()          # in-memory</a:t>
-            </a:r>
-            <a:endParaRPr lang="en-IN" sz="1250" b="0" u="none" strike="noStrike">
+              <a:t>chroma_client = chromadb.Client()      # in-memory</a:t>
+            </a:r>
+            <a:endParaRPr lang="en-IN" sz="1200" b="0" u="none" strike="noStrike">
               <a:solidFill>
                 <a:srgbClr val="000000"/>
               </a:solidFill>
@@ -23848,7 +23732,7 @@
               </a:tabLst>
             </a:pPr>
             <a:r>
-              <a:rPr lang="en-US" sz="1250" b="0" u="none" strike="noStrike">
+              <a:rPr lang="en-US" sz="1200" b="0" u="none" strike="noStrike">
                 <a:solidFill>
                   <a:srgbClr val="1E293B"/>
                 </a:solidFill>
@@ -23857,9 +23741,9 @@
                 <a:latin typeface="Courier New"/>
                 <a:ea typeface="Courier New"/>
               </a:rPr>
-              <a:t>col = db.get_or_create_collection("notes")</a:t>
-            </a:r>
-            <a:endParaRPr lang="en-IN" sz="1250" b="0" u="none" strike="noStrike">
+              <a:t>collection = chroma_client.get_or_create_collection(</a:t>
+            </a:r>
+            <a:endParaRPr lang="en-IN" sz="1200" b="0" u="none" strike="noStrike">
               <a:solidFill>
                 <a:srgbClr val="000000"/>
               </a:solidFill>
@@ -23877,7 +23761,19 @@
                 <a:tab pos="0" algn="l"/>
               </a:tabLst>
             </a:pPr>
-            <a:endParaRPr lang="en-IN" sz="1250" b="0" u="none" strike="noStrike">
+            <a:r>
+              <a:rPr lang="en-US" sz="1200" b="0" u="none" strike="noStrike">
+                <a:solidFill>
+                  <a:srgbClr val="1E293B"/>
+                </a:solidFill>
+                <a:effectLst/>
+                <a:uFillTx/>
+                <a:latin typeface="Courier New"/>
+                <a:ea typeface="Courier New"/>
+              </a:rPr>
+              <a:t>    name="techsolutions")</a:t>
+            </a:r>
+            <a:endParaRPr lang="en-IN" sz="1200" b="0" u="none" strike="noStrike">
               <a:solidFill>
                 <a:srgbClr val="000000"/>
               </a:solidFill>
@@ -23895,19 +23791,7 @@
                 <a:tab pos="0" algn="l"/>
               </a:tabLst>
             </a:pPr>
-            <a:r>
-              <a:rPr lang="en-US" sz="1250" b="0" u="none" strike="noStrike">
-                <a:solidFill>
-                  <a:srgbClr val="1E293B"/>
-                </a:solidFill>
-                <a:effectLst/>
-                <a:uFillTx/>
-                <a:latin typeface="Courier New"/>
-                <a:ea typeface="Courier New"/>
-              </a:rPr>
-              <a:t>col.add(</a:t>
-            </a:r>
-            <a:endParaRPr lang="en-IN" sz="1250" b="0" u="none" strike="noStrike">
+            <a:endParaRPr lang="en-IN" sz="1200" b="0" u="none" strike="noStrike">
               <a:solidFill>
                 <a:srgbClr val="000000"/>
               </a:solidFill>
@@ -23926,7 +23810,7 @@
               </a:tabLst>
             </a:pPr>
             <a:r>
-              <a:rPr lang="en-US" sz="1250" b="0" u="none" strike="noStrike">
+              <a:rPr lang="en-US" sz="1200" b="0" u="none" strike="noStrike">
                 <a:solidFill>
                   <a:srgbClr val="1E293B"/>
                 </a:solidFill>
@@ -23935,9 +23819,9 @@
                 <a:latin typeface="Courier New"/>
                 <a:ea typeface="Courier New"/>
               </a:rPr>
-              <a:t>    ids=["c1", "c2"],            # to update / delete later</a:t>
-            </a:r>
-            <a:endParaRPr lang="en-IN" sz="1250" b="0" u="none" strike="noStrike">
+              <a:t>collection.add(</a:t>
+            </a:r>
+            <a:endParaRPr lang="en-IN" sz="1200" b="0" u="none" strike="noStrike">
               <a:solidFill>
                 <a:srgbClr val="000000"/>
               </a:solidFill>
@@ -23956,7 +23840,7 @@
               </a:tabLst>
             </a:pPr>
             <a:r>
-              <a:rPr lang="en-US" sz="1250" b="0" u="none" strike="noStrike">
+              <a:rPr lang="en-US" sz="1200" b="0" u="none" strike="noStrike">
                 <a:solidFill>
                   <a:srgbClr val="1E293B"/>
                 </a:solidFill>
@@ -23965,9 +23849,9 @@
                 <a:latin typeface="Courier New"/>
                 <a:ea typeface="Courier New"/>
               </a:rPr>
-              <a:t>    documents=[text1, text2],    # the text, kept alongside</a:t>
-            </a:r>
-            <a:endParaRPr lang="en-IN" sz="1250" b="0" u="none" strike="noStrike">
+              <a:t>    ids=[f"chunk_{i}" for i in range(len(chunks))],</a:t>
+            </a:r>
+            <a:endParaRPr lang="en-IN" sz="1200" b="0" u="none" strike="noStrike">
               <a:solidFill>
                 <a:srgbClr val="000000"/>
               </a:solidFill>
@@ -23986,7 +23870,7 @@
               </a:tabLst>
             </a:pPr>
             <a:r>
-              <a:rPr lang="en-US" sz="1250" b="0" u="none" strike="noStrike">
+              <a:rPr lang="en-US" sz="1200" b="0" u="none" strike="noStrike">
                 <a:solidFill>
                   <a:srgbClr val="1E293B"/>
                 </a:solidFill>
@@ -23995,9 +23879,9 @@
                 <a:latin typeface="Courier New"/>
                 <a:ea typeface="Courier New"/>
               </a:rPr>
-              <a:t>    embeddings=[vec1, vec2],     # the vectors from §2</a:t>
-            </a:r>
-            <a:endParaRPr lang="en-IN" sz="1250" b="0" u="none" strike="noStrike">
+              <a:t>    embeddings=model.encode(chunks).tolist(),</a:t>
+            </a:r>
+            <a:endParaRPr lang="en-IN" sz="1200" b="0" u="none" strike="noStrike">
               <a:solidFill>
                 <a:srgbClr val="000000"/>
               </a:solidFill>
@@ -24016,7 +23900,7 @@
               </a:tabLst>
             </a:pPr>
             <a:r>
-              <a:rPr lang="en-US" sz="1250" b="0" u="none" strike="noStrike">
+              <a:rPr lang="en-US" sz="1200" b="0" u="none" strike="noStrike">
                 <a:solidFill>
                   <a:srgbClr val="1E293B"/>
                 </a:solidFill>
@@ -24025,9 +23909,9 @@
                 <a:latin typeface="Courier New"/>
                 <a:ea typeface="Courier New"/>
               </a:rPr>
-              <a:t>    metadatas=[{"day": 1}, {"day": 2}],</a:t>
-            </a:r>
-            <a:endParaRPr lang="en-IN" sz="1250" b="0" u="none" strike="noStrike">
+              <a:t>    documents=chunks,</a:t>
+            </a:r>
+            <a:endParaRPr lang="en-IN" sz="1200" b="0" u="none" strike="noStrike">
               <a:solidFill>
                 <a:srgbClr val="000000"/>
               </a:solidFill>
@@ -24046,7 +23930,7 @@
               </a:tabLst>
             </a:pPr>
             <a:r>
-              <a:rPr lang="en-US" sz="1250" b="0" u="none" strike="noStrike">
+              <a:rPr lang="en-US" sz="1200" b="0" u="none" strike="noStrike">
                 <a:solidFill>
                   <a:srgbClr val="1E293B"/>
                 </a:solidFill>
@@ -24057,7 +23941,7 @@
               </a:rPr>
               <a:t>)</a:t>
             </a:r>
-            <a:endParaRPr lang="en-IN" sz="1250" b="0" u="none" strike="noStrike">
+            <a:endParaRPr lang="en-IN" sz="1200" b="0" u="none" strike="noStrike">
               <a:solidFill>
                 <a:srgbClr val="000000"/>
               </a:solidFill>
@@ -24075,7 +23959,7 @@
                 <a:tab pos="0" algn="l"/>
               </a:tabLst>
             </a:pPr>
-            <a:endParaRPr lang="en-IN" sz="1250" b="0" u="none" strike="noStrike">
+            <a:endParaRPr lang="en-IN" sz="1200" b="0" u="none" strike="noStrike">
               <a:solidFill>
                 <a:srgbClr val="000000"/>
               </a:solidFill>
@@ -24094,7 +23978,7 @@
               </a:tabLst>
             </a:pPr>
             <a:r>
-              <a:rPr lang="en-US" sz="1250" b="0" u="none" strike="noStrike">
+              <a:rPr lang="en-US" sz="1200" b="0" u="none" strike="noStrike">
                 <a:solidFill>
                   <a:srgbClr val="1E293B"/>
                 </a:solidFill>
@@ -24103,9 +23987,9 @@
                 <a:latin typeface="Courier New"/>
                 <a:ea typeface="Courier New"/>
               </a:rPr>
-              <a:t>res = col.query(</a:t>
-            </a:r>
-            <a:endParaRPr lang="en-IN" sz="1250" b="0" u="none" strike="noStrike">
+              <a:t>results = collection.query(</a:t>
+            </a:r>
+            <a:endParaRPr lang="en-IN" sz="1200" b="0" u="none" strike="noStrike">
               <a:solidFill>
                 <a:srgbClr val="000000"/>
               </a:solidFill>
@@ -24124,7 +24008,7 @@
               </a:tabLst>
             </a:pPr>
             <a:r>
-              <a:rPr lang="en-US" sz="1250" b="0" u="none" strike="noStrike">
+              <a:rPr lang="en-US" sz="1200" b="0" u="none" strike="noStrike">
                 <a:solidFill>
                   <a:srgbClr val="1E293B"/>
                 </a:solidFill>
@@ -24133,9 +24017,9 @@
                 <a:latin typeface="Courier New"/>
                 <a:ea typeface="Courier New"/>
               </a:rPr>
-              <a:t>    query_embeddings=[embed("what is a token?")],</a:t>
-            </a:r>
-            <a:endParaRPr lang="en-IN" sz="1250" b="0" u="none" strike="noStrike">
+              <a:t>    query_embeddings=model.encode(</a:t>
+            </a:r>
+            <a:endParaRPr lang="en-IN" sz="1200" b="0" u="none" strike="noStrike">
               <a:solidFill>
                 <a:srgbClr val="000000"/>
               </a:solidFill>
@@ -24154,7 +24038,7 @@
               </a:tabLst>
             </a:pPr>
             <a:r>
-              <a:rPr lang="en-US" sz="1250" b="0" u="none" strike="noStrike">
+              <a:rPr lang="en-US" sz="1200" b="0" u="none" strike="noStrike">
                 <a:solidFill>
                   <a:srgbClr val="1E293B"/>
                 </a:solidFill>
@@ -24163,9 +24047,9 @@
                 <a:latin typeface="Courier New"/>
                 <a:ea typeface="Courier New"/>
               </a:rPr>
-              <a:t>    n_results=3,</a:t>
-            </a:r>
-            <a:endParaRPr lang="en-IN" sz="1250" b="0" u="none" strike="noStrike">
+              <a:t>        ["Who founded the company?"]).tolist(),</a:t>
+            </a:r>
+            <a:endParaRPr lang="en-IN" sz="1200" b="0" u="none" strike="noStrike">
               <a:solidFill>
                 <a:srgbClr val="000000"/>
               </a:solidFill>
@@ -24184,7 +24068,7 @@
               </a:tabLst>
             </a:pPr>
             <a:r>
-              <a:rPr lang="en-US" sz="1250" b="0" u="none" strike="noStrike">
+              <a:rPr lang="en-US" sz="1200" b="0" u="none" strike="noStrike">
                 <a:solidFill>
                   <a:srgbClr val="1E293B"/>
                 </a:solidFill>
@@ -24193,9 +24077,9 @@
                 <a:latin typeface="Courier New"/>
                 <a:ea typeface="Courier New"/>
               </a:rPr>
-              <a:t>    where={"day": 1},            # filter first — optional</a:t>
-            </a:r>
-            <a:endParaRPr lang="en-IN" sz="1250" b="0" u="none" strike="noStrike">
+              <a:t>    n_results=3,</a:t>
+            </a:r>
+            <a:endParaRPr lang="en-IN" sz="1200" b="0" u="none" strike="noStrike">
               <a:solidFill>
                 <a:srgbClr val="000000"/>
               </a:solidFill>
@@ -24214,7 +24098,7 @@
               </a:tabLst>
             </a:pPr>
             <a:r>
-              <a:rPr lang="en-US" sz="1250" b="0" u="none" strike="noStrike">
+              <a:rPr lang="en-US" sz="1200" b="0" u="none" strike="noStrike">
                 <a:solidFill>
                   <a:srgbClr val="1E293B"/>
                 </a:solidFill>
@@ -24225,7 +24109,7 @@
               </a:rPr>
               <a:t>)</a:t>
             </a:r>
-            <a:endParaRPr lang="en-IN" sz="1250" b="0" u="none" strike="noStrike">
+            <a:endParaRPr lang="en-IN" sz="1200" b="0" u="none" strike="noStrike">
               <a:solidFill>
                 <a:srgbClr val="000000"/>
               </a:solidFill>
@@ -24244,7 +24128,7 @@
               </a:tabLst>
             </a:pPr>
             <a:r>
-              <a:rPr lang="en-US" sz="1250" b="0" u="none" strike="noStrike">
+              <a:rPr lang="en-US" sz="1200" b="0" u="none" strike="noStrike">
                 <a:solidFill>
                   <a:srgbClr val="1E293B"/>
                 </a:solidFill>
@@ -24253,9 +24137,9 @@
                 <a:latin typeface="Courier New"/>
                 <a:ea typeface="Courier New"/>
               </a:rPr>
-              <a:t>res["documents"][0]</a:t>
-            </a:r>
-            <a:endParaRPr lang="en-IN" sz="1250" b="0" u="none" strike="noStrike">
+              <a:t>results["documents"][0]</a:t>
+            </a:r>
+            <a:endParaRPr lang="en-IN" sz="1200" b="0" u="none" strike="noStrike">
               <a:solidFill>
                 <a:srgbClr val="000000"/>
               </a:solidFill>
@@ -24510,8 +24394,8 @@
         </p:nvSpPr>
         <p:spPr>
           <a:xfrm>
-            <a:off x="8183880" y="3840480"/>
-            <a:ext cx="3200040" cy="1279800"/>
+            <a:off x="8183880" y="3703320"/>
+            <a:ext cx="3200040" cy="1005480"/>
           </a:xfrm>
           <a:prstGeom prst="rect">
             <a:avLst/>
@@ -24619,8 +24503,8 @@
         </p:nvSpPr>
         <p:spPr>
           <a:xfrm>
-            <a:off x="548640" y="6473880"/>
-            <a:ext cx="5486040" cy="228240"/>
+            <a:off x="8183880" y="4800600"/>
+            <a:ext cx="3200040" cy="822600"/>
           </a:xfrm>
           <a:prstGeom prst="rect">
             <a:avLst/>
@@ -24650,15 +24534,100 @@
               </a:tabLst>
             </a:pPr>
             <a:r>
-              <a:rPr lang="en-US" sz="900" b="0" u="none" strike="noStrike">
-                <a:solidFill>
-                  <a:srgbClr val="64748B"/>
+              <a:rPr lang="en-US" sz="1350" b="0" u="none" strike="noStrike">
+                <a:solidFill>
+                  <a:srgbClr val="1E293B"/>
                 </a:solidFill>
                 <a:effectLst/>
                 <a:uFillTx/>
                 <a:latin typeface="Calibri"/>
                 <a:ea typeface="Calibri"/>
               </a:rPr>
+              <a:t>3.  </a:t>
+            </a:r>
+            <a:r>
+              <a:rPr lang="en-US" sz="1350" b="1" u="none" strike="noStrike">
+                <a:solidFill>
+                  <a:srgbClr val="B91C1C"/>
+                </a:solidFill>
+                <a:effectLst/>
+                <a:uFillTx/>
+                <a:latin typeface="Courier New"/>
+                <a:ea typeface="Courier New"/>
+              </a:rPr>
+              <a:t>.tolist()</a:t>
+            </a:r>
+            <a:r>
+              <a:rPr lang="en-US" sz="1350" b="0" u="none" strike="noStrike">
+                <a:solidFill>
+                  <a:srgbClr val="1E293B"/>
+                </a:solidFill>
+                <a:effectLst/>
+                <a:uFillTx/>
+                <a:latin typeface="Calibri"/>
+                <a:ea typeface="Calibri"/>
+              </a:rPr>
+              <a:t> — encode() returns numpy; Chroma wants plain lists.</a:t>
+            </a:r>
+            <a:endParaRPr lang="en-IN" sz="1350" b="0" u="none" strike="noStrike">
+              <a:solidFill>
+                <a:srgbClr val="000000"/>
+              </a:solidFill>
+              <a:effectLst/>
+              <a:uFillTx/>
+              <a:latin typeface="Arial"/>
+            </a:endParaRPr>
+          </a:p>
+        </p:txBody>
+      </p:sp>
+      <p:sp>
+        <p:nvSpPr>
+          <p:cNvPr id="314" name="Text 8"/>
+          <p:cNvSpPr/>
+          <p:nvPr/>
+        </p:nvSpPr>
+        <p:spPr>
+          <a:xfrm>
+            <a:off x="548640" y="6473880"/>
+            <a:ext cx="5486040" cy="228240"/>
+          </a:xfrm>
+          <a:prstGeom prst="rect">
+            <a:avLst/>
+          </a:prstGeom>
+          <a:noFill/>
+          <a:ln w="0">
+            <a:noFill/>
+          </a:ln>
+        </p:spPr>
+        <p:style>
+          <a:lnRef idx="0"/>
+          <a:fillRef idx="0"/>
+          <a:effectRef idx="0"/>
+          <a:fontRef idx="minor"/>
+        </p:style>
+        <p:txBody>
+          <a:bodyPr lIns="0" tIns="0" rIns="0" bIns="0" anchor="ctr">
+            <a:noAutofit/>
+          </a:bodyPr>
+          <a:p>
+            <a:pPr defTabSz="914400">
+              <a:lnSpc>
+                <a:spcPct val="100000"/>
+              </a:lnSpc>
+              <a:tabLst>
+                <a:tab pos="0" algn="l"/>
+              </a:tabLst>
+            </a:pPr>
+            <a:r>
+              <a:rPr lang="en-US" sz="900" b="0" u="none" strike="noStrike">
+                <a:solidFill>
+                  <a:srgbClr val="64748B"/>
+                </a:solidFill>
+                <a:effectLst/>
+                <a:uFillTx/>
+                <a:latin typeface="Calibri"/>
+                <a:ea typeface="Calibri"/>
+              </a:rPr>
               <a:t>Generative AI · Day 3</a:t>
             </a:r>
             <a:endParaRPr lang="en-IN" sz="900" b="0" u="none" strike="noStrike">
@@ -24674,7 +24643,7 @@
       </p:sp>
       <p:sp>
         <p:nvSpPr>
-          <p:cNvPr id="314" name="Text 8"/>
+          <p:cNvPr id="315" name="Text 9"/>
           <p:cNvSpPr/>
           <p:nvPr/>
         </p:nvSpPr>
@@ -24765,7 +24734,7 @@
       </p:grpSpPr>
       <p:sp>
         <p:nvSpPr>
-          <p:cNvPr id="315" name="Text 0"/>
+          <p:cNvPr id="316" name="Text 0"/>
           <p:cNvSpPr/>
           <p:nvPr/>
         </p:nvSpPr>
@@ -24826,7 +24795,7 @@
       </p:sp>
       <p:graphicFrame>
         <p:nvGraphicFramePr>
-          <p:cNvPr id="316" name="Table 0"/>
+          <p:cNvPr id="317" name="Table 0"/>
           <p:cNvGraphicFramePr/>
           <p:nvPr/>
         </p:nvGraphicFramePr>
@@ -26249,7 +26218,7 @@
       </p:graphicFrame>
       <p:sp>
         <p:nvSpPr>
-          <p:cNvPr id="317" name="Shape 1"/>
+          <p:cNvPr id="318" name="Shape 1"/>
           <p:cNvSpPr/>
           <p:nvPr/>
         </p:nvSpPr>
@@ -26297,7 +26266,7 @@
       </p:sp>
       <p:sp>
         <p:nvSpPr>
-          <p:cNvPr id="318" name="Text 2"/>
+          <p:cNvPr id="319" name="Text 2"/>
           <p:cNvSpPr/>
           <p:nvPr/>
         </p:nvSpPr>
@@ -26370,7 +26339,7 @@
       </p:sp>
       <p:sp>
         <p:nvSpPr>
-          <p:cNvPr id="319" name="Text 3"/>
+          <p:cNvPr id="320" name="Text 3"/>
           <p:cNvSpPr/>
           <p:nvPr/>
         </p:nvSpPr>
@@ -26431,7 +26400,7 @@
       </p:sp>
       <p:sp>
         <p:nvSpPr>
-          <p:cNvPr id="320" name="Text 4"/>
+          <p:cNvPr id="321" name="Text 4"/>
           <p:cNvSpPr/>
           <p:nvPr/>
         </p:nvSpPr>
@@ -26522,7 +26491,7 @@
       </p:grpSpPr>
       <p:sp>
         <p:nvSpPr>
-          <p:cNvPr id="321" name="Text 0"/>
+          <p:cNvPr id="322" name="Text 0"/>
           <p:cNvSpPr/>
           <p:nvPr/>
         </p:nvSpPr>
@@ -26583,7 +26552,7 @@
       </p:sp>
       <p:sp>
         <p:nvSpPr>
-          <p:cNvPr id="322" name="Text 1"/>
+          <p:cNvPr id="323" name="Text 1"/>
           <p:cNvSpPr/>
           <p:nvPr/>
         </p:nvSpPr>
@@ -26644,7 +26613,7 @@
       </p:sp>
       <p:sp>
         <p:nvSpPr>
-          <p:cNvPr id="323" name="Shape 2"/>
+          <p:cNvPr id="324" name="Shape 2"/>
           <p:cNvSpPr/>
           <p:nvPr/>
         </p:nvSpPr>
@@ -26689,7 +26658,7 @@
       </p:sp>
       <p:sp>
         <p:nvSpPr>
-          <p:cNvPr id="324" name="Text 3"/>
+          <p:cNvPr id="325" name="Text 3"/>
           <p:cNvSpPr/>
           <p:nvPr/>
         </p:nvSpPr>
@@ -26750,7 +26719,7 @@
       </p:sp>
       <p:sp>
         <p:nvSpPr>
-          <p:cNvPr id="325" name="Text 4"/>
+          <p:cNvPr id="326" name="Text 4"/>
           <p:cNvSpPr/>
           <p:nvPr/>
         </p:nvSpPr>
@@ -26811,7 +26780,7 @@
       </p:sp>
       <p:sp>
         <p:nvSpPr>
-          <p:cNvPr id="326" name="Shape 5"/>
+          <p:cNvPr id="327" name="Shape 5"/>
           <p:cNvSpPr/>
           <p:nvPr/>
         </p:nvSpPr>
@@ -26856,7 +26825,7 @@
       </p:sp>
       <p:sp>
         <p:nvSpPr>
-          <p:cNvPr id="327" name="Text 6"/>
+          <p:cNvPr id="328" name="Text 6"/>
           <p:cNvSpPr/>
           <p:nvPr/>
         </p:nvSpPr>
@@ -26917,7 +26886,7 @@
       </p:sp>
       <p:sp>
         <p:nvSpPr>
-          <p:cNvPr id="328" name="Text 7"/>
+          <p:cNvPr id="329" name="Text 7"/>
           <p:cNvSpPr/>
           <p:nvPr/>
         </p:nvSpPr>
@@ -26978,7 +26947,7 @@
       </p:sp>
       <p:sp>
         <p:nvSpPr>
-          <p:cNvPr id="329" name="Shape 8"/>
+          <p:cNvPr id="330" name="Shape 8"/>
           <p:cNvSpPr/>
           <p:nvPr/>
         </p:nvSpPr>
@@ -27023,7 +26992,7 @@
       </p:sp>
       <p:sp>
         <p:nvSpPr>
-          <p:cNvPr id="330" name="Text 9"/>
+          <p:cNvPr id="331" name="Text 9"/>
           <p:cNvSpPr/>
           <p:nvPr/>
         </p:nvSpPr>
@@ -27084,7 +27053,7 @@
       </p:sp>
       <p:sp>
         <p:nvSpPr>
-          <p:cNvPr id="331" name="Text 10"/>
+          <p:cNvPr id="332" name="Text 10"/>
           <p:cNvSpPr/>
           <p:nvPr/>
         </p:nvSpPr>
@@ -27145,7 +27114,7 @@
       </p:sp>
       <p:sp>
         <p:nvSpPr>
-          <p:cNvPr id="332" name="Shape 11"/>
+          <p:cNvPr id="333" name="Shape 11"/>
           <p:cNvSpPr/>
           <p:nvPr/>
         </p:nvSpPr>
@@ -27190,7 +27159,7 @@
       </p:sp>
       <p:sp>
         <p:nvSpPr>
-          <p:cNvPr id="333" name="Text 12"/>
+          <p:cNvPr id="334" name="Text 12"/>
           <p:cNvSpPr/>
           <p:nvPr/>
         </p:nvSpPr>
@@ -27251,7 +27220,7 @@
       </p:sp>
       <p:sp>
         <p:nvSpPr>
-          <p:cNvPr id="334" name="Text 13"/>
+          <p:cNvPr id="335" name="Text 13"/>
           <p:cNvSpPr/>
           <p:nvPr/>
         </p:nvSpPr>
@@ -27312,7 +27281,7 @@
       </p:sp>
       <p:sp>
         <p:nvSpPr>
-          <p:cNvPr id="335" name="Text 14"/>
+          <p:cNvPr id="336" name="Text 14"/>
           <p:cNvSpPr/>
           <p:nvPr/>
         </p:nvSpPr>
@@ -27373,7 +27342,7 @@
       </p:sp>
       <p:sp>
         <p:nvSpPr>
-          <p:cNvPr id="336" name="Text 15"/>
+          <p:cNvPr id="337" name="Text 15"/>
           <p:cNvSpPr/>
           <p:nvPr/>
         </p:nvSpPr>
@@ -27471,7 +27440,7 @@
       </p:grpSpPr>
       <p:sp>
         <p:nvSpPr>
-          <p:cNvPr id="337" name="Text 0"/>
+          <p:cNvPr id="338" name="Text 0"/>
           <p:cNvSpPr/>
           <p:nvPr/>
         </p:nvSpPr>
@@ -27532,7 +27501,7 @@
       </p:sp>
       <p:sp>
         <p:nvSpPr>
-          <p:cNvPr id="338" name="Text 1"/>
+          <p:cNvPr id="339" name="Text 1"/>
           <p:cNvSpPr/>
           <p:nvPr/>
         </p:nvSpPr>
@@ -28971,7 +28940,7 @@
       </p:grpSpPr>
       <p:sp>
         <p:nvSpPr>
-          <p:cNvPr id="339" name="Text 0"/>
+          <p:cNvPr id="340" name="Text 0"/>
           <p:cNvSpPr/>
           <p:nvPr/>
         </p:nvSpPr>
@@ -29017,7 +28986,7 @@
                 <a:latin typeface="Calibri"/>
                 <a:ea typeface="Calibri"/>
               </a:rPr>
-              <a:t>A search engine over your own notes</a:t>
+              <a:t>A search engine over a real document</a:t>
             </a:r>
             <a:endParaRPr lang="en-IN" sz="3000" b="0" u="none" strike="noStrike">
               <a:solidFill>
@@ -29032,7 +29001,7 @@
       </p:sp>
       <p:sp>
         <p:nvSpPr>
-          <p:cNvPr id="340" name="Shape 1"/>
+          <p:cNvPr id="341" name="Shape 1"/>
           <p:cNvSpPr/>
           <p:nvPr/>
         </p:nvSpPr>
@@ -29080,7 +29049,7 @@
       </p:sp>
       <p:sp>
         <p:nvSpPr>
-          <p:cNvPr id="341" name="Text 2"/>
+          <p:cNvPr id="342" name="Text 2"/>
           <p:cNvSpPr/>
           <p:nvPr/>
         </p:nvSpPr>
@@ -29117,7 +29086,7 @@
               </a:tabLst>
             </a:pPr>
             <a:r>
-              <a:rPr lang="en-US" sz="1300" b="0" u="none" strike="noStrike">
+              <a:rPr lang="en-US" sz="1200" b="0" u="none" strike="noStrike">
                 <a:solidFill>
                   <a:srgbClr val="1E293B"/>
                 </a:solidFill>
@@ -29128,7 +29097,7 @@
               </a:rPr>
               <a:t># INDEX  (once, offline)</a:t>
             </a:r>
-            <a:endParaRPr lang="en-IN" sz="1300" b="0" u="none" strike="noStrike">
+            <a:endParaRPr lang="en-IN" sz="1200" b="0" u="none" strike="noStrike">
               <a:solidFill>
                 <a:srgbClr val="000000"/>
               </a:solidFill>
@@ -29147,7 +29116,7 @@
               </a:tabLst>
             </a:pPr>
             <a:r>
-              <a:rPr lang="en-US" sz="1300" b="0" u="none" strike="noStrike">
+              <a:rPr lang="en-US" sz="1200" b="0" u="none" strike="noStrike">
                 <a:solidFill>
                   <a:srgbClr val="1E293B"/>
                 </a:solidFill>
@@ -29156,9 +29125,9 @@
                 <a:latin typeface="Courier New"/>
                 <a:ea typeface="Courier New"/>
               </a:rPr>
-              <a:t>chunks = chunk_text(NOTES, size=400, overlap=80)</a:t>
-            </a:r>
-            <a:endParaRPr lang="en-IN" sz="1300" b="0" u="none" strike="noStrike">
+              <a:t>chunks = splitter.split_text(company_info)</a:t>
+            </a:r>
+            <a:endParaRPr lang="en-IN" sz="1200" b="0" u="none" strike="noStrike">
               <a:solidFill>
                 <a:srgbClr val="000000"/>
               </a:solidFill>
@@ -29177,7 +29146,7 @@
               </a:tabLst>
             </a:pPr>
             <a:r>
-              <a:rPr lang="en-US" sz="1300" b="0" u="none" strike="noStrike">
+              <a:rPr lang="en-US" sz="1200" b="0" u="none" strike="noStrike">
                 <a:solidFill>
                   <a:srgbClr val="1E293B"/>
                 </a:solidFill>
@@ -29186,9 +29155,9 @@
                 <a:latin typeface="Courier New"/>
                 <a:ea typeface="Courier New"/>
               </a:rPr>
-              <a:t>col.add(ids=…, documents=chunks, embeddings=embed(chunks))</a:t>
-            </a:r>
-            <a:endParaRPr lang="en-IN" sz="1300" b="0" u="none" strike="noStrike">
+              <a:t>collection.add(ids=…, documents=chunks,</a:t>
+            </a:r>
+            <a:endParaRPr lang="en-IN" sz="1200" b="0" u="none" strike="noStrike">
               <a:solidFill>
                 <a:srgbClr val="000000"/>
               </a:solidFill>
@@ -29206,7 +29175,19 @@
                 <a:tab pos="0" algn="l"/>
               </a:tabLst>
             </a:pPr>
-            <a:endParaRPr lang="en-IN" sz="1300" b="0" u="none" strike="noStrike">
+            <a:r>
+              <a:rPr lang="en-US" sz="1200" b="0" u="none" strike="noStrike">
+                <a:solidFill>
+                  <a:srgbClr val="1E293B"/>
+                </a:solidFill>
+                <a:effectLst/>
+                <a:uFillTx/>
+                <a:latin typeface="Courier New"/>
+                <a:ea typeface="Courier New"/>
+              </a:rPr>
+              <a:t>               embeddings=model.encode(chunks).tolist())</a:t>
+            </a:r>
+            <a:endParaRPr lang="en-IN" sz="1200" b="0" u="none" strike="noStrike">
               <a:solidFill>
                 <a:srgbClr val="000000"/>
               </a:solidFill>
@@ -29224,19 +29205,7 @@
                 <a:tab pos="0" algn="l"/>
               </a:tabLst>
             </a:pPr>
-            <a:r>
-              <a:rPr lang="en-US" sz="1300" b="0" u="none" strike="noStrike">
-                <a:solidFill>
-                  <a:srgbClr val="1E293B"/>
-                </a:solidFill>
-                <a:effectLst/>
-                <a:uFillTx/>
-                <a:latin typeface="Courier New"/>
-                <a:ea typeface="Courier New"/>
-              </a:rPr>
-              <a:t># SEARCH (every request)</a:t>
-            </a:r>
-            <a:endParaRPr lang="en-IN" sz="1300" b="0" u="none" strike="noStrike">
+            <a:endParaRPr lang="en-IN" sz="1200" b="0" u="none" strike="noStrike">
               <a:solidFill>
                 <a:srgbClr val="000000"/>
               </a:solidFill>
@@ -29255,7 +29224,7 @@
               </a:tabLst>
             </a:pPr>
             <a:r>
-              <a:rPr lang="en-US" sz="1300" b="0" u="none" strike="noStrike">
+              <a:rPr lang="en-US" sz="1200" b="0" u="none" strike="noStrike">
                 <a:solidFill>
                   <a:srgbClr val="1E293B"/>
                 </a:solidFill>
@@ -29264,22 +29233,82 @@
                 <a:latin typeface="Courier New"/>
                 <a:ea typeface="Courier New"/>
               </a:rPr>
-              <a:t>res = col.query(query_embeddings=[embed(question)], n_results=3)</a:t>
-            </a:r>
-            <a:endParaRPr lang="en-IN" sz="1300" b="0" u="none" strike="noStrike">
-              <a:solidFill>
-                <a:srgbClr val="000000"/>
-              </a:solidFill>
-              <a:effectLst/>
-              <a:uFillTx/>
-              <a:latin typeface="Arial"/>
-            </a:endParaRPr>
-          </a:p>
-        </p:txBody>
-      </p:sp>
-      <p:sp>
-        <p:nvSpPr>
-          <p:cNvPr id="342" name="Shape 3"/>
+              <a:t># SEARCH (every request)</a:t>
+            </a:r>
+            <a:endParaRPr lang="en-IN" sz="1200" b="0" u="none" strike="noStrike">
+              <a:solidFill>
+                <a:srgbClr val="000000"/>
+              </a:solidFill>
+              <a:effectLst/>
+              <a:uFillTx/>
+              <a:latin typeface="Arial"/>
+            </a:endParaRPr>
+          </a:p>
+          <a:p>
+            <a:pPr defTabSz="914400">
+              <a:lnSpc>
+                <a:spcPct val="115000"/>
+              </a:lnSpc>
+              <a:tabLst>
+                <a:tab pos="0" algn="l"/>
+              </a:tabLst>
+            </a:pPr>
+            <a:r>
+              <a:rPr lang="en-US" sz="1200" b="0" u="none" strike="noStrike">
+                <a:solidFill>
+                  <a:srgbClr val="1E293B"/>
+                </a:solidFill>
+                <a:effectLst/>
+                <a:uFillTx/>
+                <a:latin typeface="Courier New"/>
+                <a:ea typeface="Courier New"/>
+              </a:rPr>
+              <a:t>results = collection.query(</a:t>
+            </a:r>
+            <a:endParaRPr lang="en-IN" sz="1200" b="0" u="none" strike="noStrike">
+              <a:solidFill>
+                <a:srgbClr val="000000"/>
+              </a:solidFill>
+              <a:effectLst/>
+              <a:uFillTx/>
+              <a:latin typeface="Arial"/>
+            </a:endParaRPr>
+          </a:p>
+          <a:p>
+            <a:pPr defTabSz="914400">
+              <a:lnSpc>
+                <a:spcPct val="115000"/>
+              </a:lnSpc>
+              <a:tabLst>
+                <a:tab pos="0" algn="l"/>
+              </a:tabLst>
+            </a:pPr>
+            <a:r>
+              <a:rPr lang="en-US" sz="1200" b="0" u="none" strike="noStrike">
+                <a:solidFill>
+                  <a:srgbClr val="1E293B"/>
+                </a:solidFill>
+                <a:effectLst/>
+                <a:uFillTx/>
+                <a:latin typeface="Courier New"/>
+                <a:ea typeface="Courier New"/>
+              </a:rPr>
+              <a:t>    query_embeddings=model.encode([question]).tolist(), n_results=3)</a:t>
+            </a:r>
+            <a:endParaRPr lang="en-IN" sz="1200" b="0" u="none" strike="noStrike">
+              <a:solidFill>
+                <a:srgbClr val="000000"/>
+              </a:solidFill>
+              <a:effectLst/>
+              <a:uFillTx/>
+              <a:latin typeface="Arial"/>
+            </a:endParaRPr>
+          </a:p>
+        </p:txBody>
+      </p:sp>
+      <p:sp>
+        <p:nvSpPr>
+          <p:cNvPr id="343" name="Shape 3"/>
           <p:cNvSpPr/>
           <p:nvPr/>
         </p:nvSpPr>
@@ -29327,7 +29356,7 @@
       </p:sp>
       <p:sp>
         <p:nvSpPr>
-          <p:cNvPr id="343" name="Text 4"/>
+          <p:cNvPr id="344" name="Text 4"/>
           <p:cNvSpPr/>
           <p:nvPr/>
         </p:nvSpPr>
@@ -29388,14 +29417,14 @@
       </p:sp>
       <p:sp>
         <p:nvSpPr>
-          <p:cNvPr id="344" name="Text 5"/>
+          <p:cNvPr id="345" name="Text 5"/>
           <p:cNvSpPr/>
           <p:nvPr/>
         </p:nvSpPr>
         <p:spPr>
           <a:xfrm>
             <a:off x="8046720" y="2057400"/>
-            <a:ext cx="3382920" cy="1371240"/>
+            <a:ext cx="3382920" cy="1462680"/>
           </a:xfrm>
           <a:prstGeom prst="rect">
             <a:avLst/>
@@ -29425,7 +29454,7 @@
               </a:tabLst>
             </a:pPr>
             <a:r>
-              <a:rPr lang="en-US" sz="1350" b="0" i="1" u="none" strike="noStrike">
+              <a:rPr lang="en-US" sz="1250" b="0" i="1" u="none" strike="noStrike">
                 <a:solidFill>
                   <a:srgbClr val="1E293B"/>
                 </a:solidFill>
@@ -29434,9 +29463,9 @@
                 <a:latin typeface="Calibri"/>
                 <a:ea typeface="Calibri"/>
               </a:rPr>
-              <a:t>“what is a token?”</a:t>
-            </a:r>
-            <a:endParaRPr lang="en-IN" sz="1350" b="0" u="none" strike="noStrike">
+              <a:t>“Who are the big customers?”</a:t>
+            </a:r>
+            <a:endParaRPr lang="en-IN" sz="1250" b="0" u="none" strike="noStrike">
               <a:solidFill>
                 <a:srgbClr val="000000"/>
               </a:solidFill>
@@ -29455,7 +29484,7 @@
               </a:tabLst>
             </a:pPr>
             <a:r>
-              <a:rPr lang="en-US" sz="1350" b="0" i="1" u="none" strike="noStrike">
+              <a:rPr lang="en-US" sz="1250" b="0" i="1" u="none" strike="noStrike">
                 <a:solidFill>
                   <a:srgbClr val="1E293B"/>
                 </a:solidFill>
@@ -29464,9 +29493,9 @@
                 <a:latin typeface="Calibri"/>
                 <a:ea typeface="Calibri"/>
               </a:rPr>
-              <a:t>“why does it make things up?”</a:t>
-            </a:r>
-            <a:endParaRPr lang="en-IN" sz="1350" b="0" u="none" strike="noStrike">
+              <a:t>   → the doc says “clients”</a:t>
+            </a:r>
+            <a:endParaRPr lang="en-IN" sz="1250" b="0" u="none" strike="noStrike">
               <a:solidFill>
                 <a:srgbClr val="000000"/>
               </a:solidFill>
@@ -29485,7 +29514,7 @@
               </a:tabLst>
             </a:pPr>
             <a:r>
-              <a:rPr lang="en-US" sz="1350" b="0" i="1" u="none" strike="noStrike">
+              <a:rPr lang="en-US" sz="1250" b="0" i="1" u="none" strike="noStrike">
                 <a:solidFill>
                   <a:srgbClr val="1E293B"/>
                 </a:solidFill>
@@ -29494,48 +29523,17 @@
                 <a:latin typeface="Calibri"/>
                 <a:ea typeface="Calibri"/>
               </a:rPr>
-              <a:t>“who runs the function?”</a:t>
-            </a:r>
-            <a:endParaRPr lang="en-IN" sz="1350" b="0" u="none" strike="noStrike">
-              <a:solidFill>
-                <a:srgbClr val="000000"/>
-              </a:solidFill>
-              <a:effectLst/>
-              <a:uFillTx/>
-              <a:latin typeface="Arial"/>
-            </a:endParaRPr>
-          </a:p>
-        </p:txBody>
-      </p:sp>
-      <p:sp>
-        <p:nvSpPr>
-          <p:cNvPr id="345" name="Text 6"/>
-          <p:cNvSpPr/>
-          <p:nvPr/>
-        </p:nvSpPr>
-        <p:spPr>
-          <a:xfrm>
-            <a:off x="548640" y="3931920"/>
-            <a:ext cx="10972440" cy="365400"/>
-          </a:xfrm>
-          <a:prstGeom prst="rect">
-            <a:avLst/>
-          </a:prstGeom>
-          <a:noFill/>
-          <a:ln w="0">
-            <a:noFill/>
-          </a:ln>
-        </p:spPr>
-        <p:style>
-          <a:lnRef idx="0"/>
-          <a:fillRef idx="0"/>
-          <a:effectRef idx="0"/>
-          <a:fontRef idx="minor"/>
-        </p:style>
-        <p:txBody>
-          <a:bodyPr lIns="0" tIns="0" rIns="0" bIns="0" anchor="ctr">
-            <a:noAutofit/>
-          </a:bodyPr>
+              <a:t>“work from home policy”</a:t>
+            </a:r>
+            <a:endParaRPr lang="en-IN" sz="1250" b="0" u="none" strike="noStrike">
+              <a:solidFill>
+                <a:srgbClr val="000000"/>
+              </a:solidFill>
+              <a:effectLst/>
+              <a:uFillTx/>
+              <a:latin typeface="Arial"/>
+            </a:endParaRPr>
+          </a:p>
           <a:p>
             <a:pPr defTabSz="914400">
               <a:lnSpc>
@@ -29546,7 +29544,7 @@
               </a:tabLst>
             </a:pPr>
             <a:r>
-              <a:rPr lang="en-US" sz="1500" b="1" u="none" strike="noStrike">
+              <a:rPr lang="en-US" sz="1250" b="0" i="1" u="none" strike="noStrike">
                 <a:solidFill>
                   <a:srgbClr val="1E293B"/>
                 </a:solidFill>
@@ -29555,7 +29553,68 @@
                 <a:latin typeface="Calibri"/>
                 <a:ea typeface="Calibri"/>
               </a:rPr>
-              <a:t>None of those use the words in the notes — the right paragraph comes back anyway.</a:t>
+              <a:t>   → the doc says “remote”</a:t>
+            </a:r>
+            <a:endParaRPr lang="en-IN" sz="1250" b="0" u="none" strike="noStrike">
+              <a:solidFill>
+                <a:srgbClr val="000000"/>
+              </a:solidFill>
+              <a:effectLst/>
+              <a:uFillTx/>
+              <a:latin typeface="Arial"/>
+            </a:endParaRPr>
+          </a:p>
+        </p:txBody>
+      </p:sp>
+      <p:sp>
+        <p:nvSpPr>
+          <p:cNvPr id="346" name="Text 6"/>
+          <p:cNvSpPr/>
+          <p:nvPr/>
+        </p:nvSpPr>
+        <p:spPr>
+          <a:xfrm>
+            <a:off x="548640" y="3931920"/>
+            <a:ext cx="10972440" cy="365400"/>
+          </a:xfrm>
+          <a:prstGeom prst="rect">
+            <a:avLst/>
+          </a:prstGeom>
+          <a:noFill/>
+          <a:ln w="0">
+            <a:noFill/>
+          </a:ln>
+        </p:spPr>
+        <p:style>
+          <a:lnRef idx="0"/>
+          <a:fillRef idx="0"/>
+          <a:effectRef idx="0"/>
+          <a:fontRef idx="minor"/>
+        </p:style>
+        <p:txBody>
+          <a:bodyPr lIns="0" tIns="0" rIns="0" bIns="0" anchor="ctr">
+            <a:noAutofit/>
+          </a:bodyPr>
+          <a:p>
+            <a:pPr defTabSz="914400">
+              <a:lnSpc>
+                <a:spcPct val="100000"/>
+              </a:lnSpc>
+              <a:tabLst>
+                <a:tab pos="0" algn="l"/>
+              </a:tabLst>
+            </a:pPr>
+            <a:r>
+              <a:rPr lang="en-US" sz="1500" b="1" u="none" strike="noStrike">
+                <a:solidFill>
+                  <a:srgbClr val="1E293B"/>
+                </a:solidFill>
+                <a:effectLst/>
+                <a:uFillTx/>
+                <a:latin typeface="Calibri"/>
+                <a:ea typeface="Calibri"/>
+              </a:rPr>
+              <a:t>None of those queries use the document's words — the right chunk comes back anyway.</a:t>
             </a:r>
             <a:endParaRPr lang="en-IN" sz="1500" b="0" u="none" strike="noStrike">
               <a:solidFill>
@@ -29570,7 +29629,7 @@
       </p:sp>
       <p:sp>
         <p:nvSpPr>
-          <p:cNvPr id="346" name="Shape 7"/>
+          <p:cNvPr id="347" name="Shape 7"/>
           <p:cNvSpPr/>
           <p:nvPr/>
         </p:nvSpPr>
@@ -29618,7 +29677,7 @@
       </p:sp>
       <p:sp>
         <p:nvSpPr>
-          <p:cNvPr id="347" name="Text 8"/>
+          <p:cNvPr id="348" name="Text 8"/>
           <p:cNvSpPr/>
           <p:nvPr/>
         </p:nvSpPr>
@@ -29676,7 +29735,7 @@
                 <a:latin typeface="Calibri"/>
                 <a:ea typeface="Calibri"/>
               </a:rPr>
-              <a:t>ask something the notes never mention — “what is the hostel fee?” — and it </a:t>
+              <a:t>ask something the document never mentions — “what is the hostel fee?” — and it </a:t>
             </a:r>
             <a:r>
               <a:rPr lang="en-US" sz="1500" b="1" u="none" strike="noStrike">
@@ -29715,7 +29774,7 @@
       </p:sp>
       <p:sp>
         <p:nvSpPr>
-          <p:cNvPr id="348" name="Text 9"/>
+          <p:cNvPr id="349" name="Text 9"/>
           <p:cNvSpPr/>
           <p:nvPr/>
         </p:nvSpPr>
@@ -29776,7 +29835,7 @@
       </p:sp>
       <p:sp>
         <p:nvSpPr>
-          <p:cNvPr id="349" name="Text 10"/>
+          <p:cNvPr id="350" name="Text 10"/>
           <p:cNvSpPr/>
           <p:nvPr/>
         </p:nvSpPr>
@@ -29867,7 +29926,7 @@
       </p:grpSpPr>
       <p:sp>
         <p:nvSpPr>
-          <p:cNvPr id="350" name="Text 0"/>
+          <p:cNvPr id="351" name="Text 0"/>
           <p:cNvSpPr/>
           <p:nvPr/>
         </p:nvSpPr>
@@ -29928,7 +29987,7 @@
       </p:sp>
       <p:sp>
         <p:nvSpPr>
-          <p:cNvPr id="351" name="Shape 1"/>
+          <p:cNvPr id="352" name="Shape 1"/>
           <p:cNvSpPr/>
           <p:nvPr/>
         </p:nvSpPr>
@@ -29976,7 +30035,7 @@
       </p:sp>
       <p:sp>
         <p:nvSpPr>
-          <p:cNvPr id="352" name="Text 2"/>
+          <p:cNvPr id="353" name="Text 2"/>
           <p:cNvSpPr/>
           <p:nvPr/>
         </p:nvSpPr>
@@ -30013,7 +30072,7 @@
               </a:tabLst>
             </a:pPr>
             <a:r>
-              <a:rPr lang="en-US" sz="1300" b="0" u="none" strike="noStrike">
+              <a:rPr lang="en-US" sz="1200" b="0" u="none" strike="noStrike">
                 <a:solidFill>
                   <a:srgbClr val="1E293B"/>
                 </a:solidFill>
@@ -30022,9 +30081,9 @@
                 <a:latin typeface="Courier New"/>
                 <a:ea typeface="Courier New"/>
               </a:rPr>
-              <a:t>context = "\n\n".join(search(question, k=3))</a:t>
-            </a:r>
-            <a:endParaRPr lang="en-IN" sz="1300" b="0" u="none" strike="noStrike">
+              <a:t>from litellm import completion</a:t>
+            </a:r>
+            <a:endParaRPr lang="en-IN" sz="1200" b="0" u="none" strike="noStrike">
               <a:solidFill>
                 <a:srgbClr val="000000"/>
               </a:solidFill>
@@ -30042,7 +30101,7 @@
                 <a:tab pos="0" algn="l"/>
               </a:tabLst>
             </a:pPr>
-            <a:endParaRPr lang="en-IN" sz="1300" b="0" u="none" strike="noStrike">
+            <a:endParaRPr lang="en-IN" sz="1200" b="0" u="none" strike="noStrike">
               <a:solidFill>
                 <a:srgbClr val="000000"/>
               </a:solidFill>
@@ -30061,7 +30120,7 @@
               </a:tabLst>
             </a:pPr>
             <a:r>
-              <a:rPr lang="en-US" sz="1300" b="0" u="none" strike="noStrike">
+              <a:rPr lang="en-US" sz="1200" b="0" u="none" strike="noStrike">
                 <a:solidFill>
                   <a:srgbClr val="1E293B"/>
                 </a:solidFill>
@@ -30070,9 +30129,9 @@
                 <a:latin typeface="Courier New"/>
                 <a:ea typeface="Courier New"/>
               </a:rPr>
-              <a:t>answer = client.chat.completions.create(</a:t>
-            </a:r>
-            <a:endParaRPr lang="en-IN" sz="1300" b="0" u="none" strike="noStrike">
+              <a:t>context = "\n\n".join(</a:t>
+            </a:r>
+            <a:endParaRPr lang="en-IN" sz="1200" b="0" u="none" strike="noStrike">
               <a:solidFill>
                 <a:srgbClr val="000000"/>
               </a:solidFill>
@@ -30091,7 +30150,7 @@
               </a:tabLst>
             </a:pPr>
             <a:r>
-              <a:rPr lang="en-US" sz="1300" b="0" u="none" strike="noStrike">
+              <a:rPr lang="en-US" sz="1200" b="0" u="none" strike="noStrike">
                 <a:solidFill>
                   <a:srgbClr val="1E293B"/>
                 </a:solidFill>
@@ -30100,9 +30159,9 @@
                 <a:latin typeface="Courier New"/>
                 <a:ea typeface="Courier New"/>
               </a:rPr>
-              <a:t>    model="gpt-4o-mini",</a:t>
-            </a:r>
-            <a:endParaRPr lang="en-IN" sz="1300" b="0" u="none" strike="noStrike">
+              <a:t>    search(question, n_results=3)["documents"][0])</a:t>
+            </a:r>
+            <a:endParaRPr lang="en-IN" sz="1200" b="0" u="none" strike="noStrike">
               <a:solidFill>
                 <a:srgbClr val="000000"/>
               </a:solidFill>
@@ -30120,19 +30179,7 @@
                 <a:tab pos="0" algn="l"/>
               </a:tabLst>
             </a:pPr>
-            <a:r>
-              <a:rPr lang="en-US" sz="1300" b="0" u="none" strike="noStrike">
-                <a:solidFill>
-                  <a:srgbClr val="1E293B"/>
-                </a:solidFill>
-                <a:effectLst/>
-                <a:uFillTx/>
-                <a:latin typeface="Courier New"/>
-                <a:ea typeface="Courier New"/>
-              </a:rPr>
-              <a:t>    messages=[</a:t>
-            </a:r>
-            <a:endParaRPr lang="en-IN" sz="1300" b="0" u="none" strike="noStrike">
+            <a:endParaRPr lang="en-IN" sz="1200" b="0" u="none" strike="noStrike">
               <a:solidFill>
                 <a:srgbClr val="000000"/>
               </a:solidFill>
@@ -30151,7 +30198,7 @@
               </a:tabLst>
             </a:pPr>
             <a:r>
-              <a:rPr lang="en-US" sz="1300" b="0" u="none" strike="noStrike">
+              <a:rPr lang="en-US" sz="1200" b="0" u="none" strike="noStrike">
                 <a:solidFill>
                   <a:srgbClr val="1E293B"/>
                 </a:solidFill>
@@ -30160,9 +30207,9 @@
                 <a:latin typeface="Courier New"/>
                 <a:ea typeface="Courier New"/>
               </a:rPr>
-              <a:t>      {"role": "system", "content":</a:t>
-            </a:r>
-            <a:endParaRPr lang="en-IN" sz="1300" b="0" u="none" strike="noStrike">
+              <a:t>answer = completion(</a:t>
+            </a:r>
+            <a:endParaRPr lang="en-IN" sz="1200" b="0" u="none" strike="noStrike">
               <a:solidFill>
                 <a:srgbClr val="000000"/>
               </a:solidFill>
@@ -30181,7 +30228,7 @@
               </a:tabLst>
             </a:pPr>
             <a:r>
-              <a:rPr lang="en-US" sz="1300" b="0" u="none" strike="noStrike">
+              <a:rPr lang="en-US" sz="1200" b="0" u="none" strike="noStrike">
                 <a:solidFill>
                   <a:srgbClr val="1E293B"/>
                 </a:solidFill>
@@ -30190,9 +30237,9 @@
                 <a:latin typeface="Courier New"/>
                 <a:ea typeface="Courier New"/>
               </a:rPr>
-              <a:t>         "Answer using ONLY the context below. "</a:t>
-            </a:r>
-            <a:endParaRPr lang="en-IN" sz="1300" b="0" u="none" strike="noStrike">
+              <a:t>    model="gpt-4o-mini",</a:t>
+            </a:r>
+            <a:endParaRPr lang="en-IN" sz="1200" b="0" u="none" strike="noStrike">
               <a:solidFill>
                 <a:srgbClr val="000000"/>
               </a:solidFill>
@@ -30211,7 +30258,7 @@
               </a:tabLst>
             </a:pPr>
             <a:r>
-              <a:rPr lang="en-US" sz="1300" b="0" u="none" strike="noStrike">
+              <a:rPr lang="en-US" sz="1200" b="0" u="none" strike="noStrike">
                 <a:solidFill>
                   <a:srgbClr val="1E293B"/>
                 </a:solidFill>
@@ -30220,9 +30267,9 @@
                 <a:latin typeface="Courier New"/>
                 <a:ea typeface="Courier New"/>
               </a:rPr>
-              <a:t>         "If it isn't there, say you don't know.\n\n" + context},</a:t>
-            </a:r>
-            <a:endParaRPr lang="en-IN" sz="1300" b="0" u="none" strike="noStrike">
+              <a:t>    messages=[</a:t>
+            </a:r>
+            <a:endParaRPr lang="en-IN" sz="1200" b="0" u="none" strike="noStrike">
               <a:solidFill>
                 <a:srgbClr val="000000"/>
               </a:solidFill>
@@ -30241,7 +30288,7 @@
               </a:tabLst>
             </a:pPr>
             <a:r>
-              <a:rPr lang="en-US" sz="1300" b="0" u="none" strike="noStrike">
+              <a:rPr lang="en-US" sz="1200" b="0" u="none" strike="noStrike">
                 <a:solidFill>
                   <a:srgbClr val="1E293B"/>
                 </a:solidFill>
@@ -30250,9 +30297,9 @@
                 <a:latin typeface="Courier New"/>
                 <a:ea typeface="Courier New"/>
               </a:rPr>
-              <a:t>      {"role": "user", "content": question},</a:t>
-            </a:r>
-            <a:endParaRPr lang="en-IN" sz="1300" b="0" u="none" strike="noStrike">
+              <a:t>      {"role": "system", "content":</a:t>
+            </a:r>
+            <a:endParaRPr lang="en-IN" sz="1200" b="0" u="none" strike="noStrike">
               <a:solidFill>
                 <a:srgbClr val="000000"/>
               </a:solidFill>
@@ -30271,7 +30318,7 @@
               </a:tabLst>
             </a:pPr>
             <a:r>
-              <a:rPr lang="en-US" sz="1300" b="0" u="none" strike="noStrike">
+              <a:rPr lang="en-US" sz="1200" b="0" u="none" strike="noStrike">
                 <a:solidFill>
                   <a:srgbClr val="1E293B"/>
                 </a:solidFill>
@@ -30280,9 +30327,9 @@
                 <a:latin typeface="Courier New"/>
                 <a:ea typeface="Courier New"/>
               </a:rPr>
-              <a:t>    ],</a:t>
-            </a:r>
-            <a:endParaRPr lang="en-IN" sz="1300" b="0" u="none" strike="noStrike">
+              <a:t>         "Answer using ONLY the context below. "</a:t>
+            </a:r>
+            <a:endParaRPr lang="en-IN" sz="1200" b="0" u="none" strike="noStrike">
               <a:solidFill>
                 <a:srgbClr val="000000"/>
               </a:solidFill>
@@ -30301,7 +30348,7 @@
               </a:tabLst>
             </a:pPr>
             <a:r>
-              <a:rPr lang="en-US" sz="1300" b="0" u="none" strike="noStrike">
+              <a:rPr lang="en-US" sz="1200" b="0" u="none" strike="noStrike">
                 <a:solidFill>
                   <a:srgbClr val="1E293B"/>
                 </a:solidFill>
@@ -30310,22 +30357,142 @@
                 <a:latin typeface="Courier New"/>
                 <a:ea typeface="Courier New"/>
               </a:rPr>
+              <a:t>         "If it isn't there, say you don't know.\n\n" + context},</a:t>
+            </a:r>
+            <a:endParaRPr lang="en-IN" sz="1200" b="0" u="none" strike="noStrike">
+              <a:solidFill>
+                <a:srgbClr val="000000"/>
+              </a:solidFill>
+              <a:effectLst/>
+              <a:uFillTx/>
+              <a:latin typeface="Arial"/>
+            </a:endParaRPr>
+          </a:p>
+          <a:p>
+            <a:pPr defTabSz="914400">
+              <a:lnSpc>
+                <a:spcPct val="115000"/>
+              </a:lnSpc>
+              <a:tabLst>
+                <a:tab pos="0" algn="l"/>
+              </a:tabLst>
+            </a:pPr>
+            <a:r>
+              <a:rPr lang="en-US" sz="1200" b="0" u="none" strike="noStrike">
+                <a:solidFill>
+                  <a:srgbClr val="1E293B"/>
+                </a:solidFill>
+                <a:effectLst/>
+                <a:uFillTx/>
+                <a:latin typeface="Courier New"/>
+                <a:ea typeface="Courier New"/>
+              </a:rPr>
+              <a:t>      {"role": "user", "content": question},</a:t>
+            </a:r>
+            <a:endParaRPr lang="en-IN" sz="1200" b="0" u="none" strike="noStrike">
+              <a:solidFill>
+                <a:srgbClr val="000000"/>
+              </a:solidFill>
+              <a:effectLst/>
+              <a:uFillTx/>
+              <a:latin typeface="Arial"/>
+            </a:endParaRPr>
+          </a:p>
+          <a:p>
+            <a:pPr defTabSz="914400">
+              <a:lnSpc>
+                <a:spcPct val="115000"/>
+              </a:lnSpc>
+              <a:tabLst>
+                <a:tab pos="0" algn="l"/>
+              </a:tabLst>
+            </a:pPr>
+            <a:r>
+              <a:rPr lang="en-US" sz="1200" b="0" u="none" strike="noStrike">
+                <a:solidFill>
+                  <a:srgbClr val="1E293B"/>
+                </a:solidFill>
+                <a:effectLst/>
+                <a:uFillTx/>
+                <a:latin typeface="Courier New"/>
+                <a:ea typeface="Courier New"/>
+              </a:rPr>
+              <a:t>    ],</a:t>
+            </a:r>
+            <a:endParaRPr lang="en-IN" sz="1200" b="0" u="none" strike="noStrike">
+              <a:solidFill>
+                <a:srgbClr val="000000"/>
+              </a:solidFill>
+              <a:effectLst/>
+              <a:uFillTx/>
+              <a:latin typeface="Arial"/>
+            </a:endParaRPr>
+          </a:p>
+          <a:p>
+            <a:pPr defTabSz="914400">
+              <a:lnSpc>
+                <a:spcPct val="115000"/>
+              </a:lnSpc>
+              <a:tabLst>
+                <a:tab pos="0" algn="l"/>
+              </a:tabLst>
+            </a:pPr>
+            <a:r>
+              <a:rPr lang="en-US" sz="1200" b="0" u="none" strike="noStrike">
+                <a:solidFill>
+                  <a:srgbClr val="1E293B"/>
+                </a:solidFill>
+                <a:effectLst/>
+                <a:uFillTx/>
+                <a:latin typeface="Courier New"/>
+                <a:ea typeface="Courier New"/>
+              </a:rPr>
+              <a:t>    temperature=0,      # reading, not inventing</a:t>
+            </a:r>
+            <a:endParaRPr lang="en-IN" sz="1200" b="0" u="none" strike="noStrike">
+              <a:solidFill>
+                <a:srgbClr val="000000"/>
+              </a:solidFill>
+              <a:effectLst/>
+              <a:uFillTx/>
+              <a:latin typeface="Arial"/>
+            </a:endParaRPr>
+          </a:p>
+          <a:p>
+            <a:pPr defTabSz="914400">
+              <a:lnSpc>
+                <a:spcPct val="115000"/>
+              </a:lnSpc>
+              <a:tabLst>
+                <a:tab pos="0" algn="l"/>
+              </a:tabLst>
+            </a:pPr>
+            <a:r>
+              <a:rPr lang="en-US" sz="1200" b="0" u="none" strike="noStrike">
+                <a:solidFill>
+                  <a:srgbClr val="1E293B"/>
+                </a:solidFill>
+                <a:effectLst/>
+                <a:uFillTx/>
+                <a:latin typeface="Courier New"/>
+                <a:ea typeface="Courier New"/>
+              </a:rPr>
               <a:t>)</a:t>
             </a:r>
-            <a:endParaRPr lang="en-IN" sz="1300" b="0" u="none" strike="noStrike">
-              <a:solidFill>
-                <a:srgbClr val="000000"/>
-              </a:solidFill>
-              <a:effectLst/>
-              <a:uFillTx/>
-              <a:latin typeface="Arial"/>
-            </a:endParaRPr>
-          </a:p>
-        </p:txBody>
-      </p:sp>
-      <p:sp>
-        <p:nvSpPr>
-          <p:cNvPr id="353" name="Shape 3"/>
+            <a:endParaRPr lang="en-IN" sz="1200" b="0" u="none" strike="noStrike">
+              <a:solidFill>
+                <a:srgbClr val="000000"/>
+              </a:solidFill>
+              <a:effectLst/>
+              <a:uFillTx/>
+              <a:latin typeface="Arial"/>
+            </a:endParaRPr>
+          </a:p>
+        </p:txBody>
+      </p:sp>
+      <p:sp>
+        <p:nvSpPr>
+          <p:cNvPr id="354" name="Shape 3"/>
           <p:cNvSpPr/>
           <p:nvPr/>
         </p:nvSpPr>
@@ -30370,7 +30537,7 @@
       </p:sp>
       <p:sp>
         <p:nvSpPr>
-          <p:cNvPr id="354" name="Text 4"/>
+          <p:cNvPr id="355" name="Text 4"/>
           <p:cNvSpPr/>
           <p:nvPr/>
         </p:nvSpPr>
@@ -30431,7 +30598,7 @@
       </p:sp>
       <p:sp>
         <p:nvSpPr>
-          <p:cNvPr id="355" name="Text 5"/>
+          <p:cNvPr id="356" name="Text 5"/>
           <p:cNvSpPr/>
           <p:nvPr/>
         </p:nvSpPr>
@@ -30492,7 +30659,7 @@
       </p:sp>
       <p:sp>
         <p:nvSpPr>
-          <p:cNvPr id="356" name="Text 6"/>
+          <p:cNvPr id="357" name="Text 6"/>
           <p:cNvSpPr/>
           <p:nvPr/>
         </p:nvSpPr>
@@ -30583,7 +30750,7 @@
       </p:sp>
       <p:sp>
         <p:nvSpPr>
-          <p:cNvPr id="357" name="Shape 7"/>
+          <p:cNvPr id="358" name="Shape 7"/>
           <p:cNvSpPr/>
           <p:nvPr/>
         </p:nvSpPr>
@@ -30628,7 +30795,7 @@
       </p:sp>
       <p:sp>
         <p:nvSpPr>
-          <p:cNvPr id="358" name="Text 8"/>
+          <p:cNvPr id="359" name="Text 8"/>
           <p:cNvSpPr/>
           <p:nvPr/>
         </p:nvSpPr>
@@ -30689,7 +30856,7 @@
       </p:sp>
       <p:sp>
         <p:nvSpPr>
-          <p:cNvPr id="359" name="Text 9"/>
+          <p:cNvPr id="360" name="Text 9"/>
           <p:cNvSpPr/>
           <p:nvPr/>
         </p:nvSpPr>
@@ -30750,7 +30917,7 @@
       </p:sp>
       <p:sp>
         <p:nvSpPr>
-          <p:cNvPr id="360" name="Text 10"/>
+          <p:cNvPr id="361" name="Text 10"/>
           <p:cNvSpPr/>
           <p:nvPr/>
         </p:nvSpPr>
@@ -30841,7 +31008,7 @@
       </p:sp>
       <p:sp>
         <p:nvSpPr>
-          <p:cNvPr id="361" name="Shape 11"/>
+          <p:cNvPr id="362" name="Shape 11"/>
           <p:cNvSpPr/>
           <p:nvPr/>
         </p:nvSpPr>
@@ -30886,7 +31053,7 @@
       </p:sp>
       <p:sp>
         <p:nvSpPr>
-          <p:cNvPr id="362" name="Text 12"/>
+          <p:cNvPr id="363" name="Text 12"/>
           <p:cNvSpPr/>
           <p:nvPr/>
         </p:nvSpPr>
@@ -30947,7 +31114,7 @@
       </p:sp>
       <p:sp>
         <p:nvSpPr>
-          <p:cNvPr id="363" name="Text 13"/>
+          <p:cNvPr id="364" name="Text 13"/>
           <p:cNvSpPr/>
           <p:nvPr/>
         </p:nvSpPr>
@@ -31008,7 +31175,7 @@
       </p:sp>
       <p:sp>
         <p:nvSpPr>
-          <p:cNvPr id="364" name="Text 14"/>
+          <p:cNvPr id="365" name="Text 14"/>
           <p:cNvSpPr/>
           <p:nvPr/>
         </p:nvSpPr>
@@ -31099,7 +31266,7 @@
       </p:sp>
       <p:sp>
         <p:nvSpPr>
-          <p:cNvPr id="365" name="Shape 15"/>
+          <p:cNvPr id="366" name="Shape 15"/>
           <p:cNvSpPr/>
           <p:nvPr/>
         </p:nvSpPr>
@@ -31147,7 +31314,7 @@
       </p:sp>
       <p:sp>
         <p:nvSpPr>
-          <p:cNvPr id="366" name="Text 16"/>
+          <p:cNvPr id="367" name="Text 16"/>
           <p:cNvSpPr/>
           <p:nvPr/>
         </p:nvSpPr>
@@ -31268,7 +31435,7 @@
       </p:sp>
       <p:sp>
         <p:nvSpPr>
-          <p:cNvPr id="367" name="Text 17"/>
+          <p:cNvPr id="368" name="Text 17"/>
           <p:cNvSpPr/>
           <p:nvPr/>
         </p:nvSpPr>
@@ -31329,7 +31496,7 @@
       </p:sp>
       <p:sp>
         <p:nvSpPr>
-          <p:cNvPr id="368" name="Text 18"/>
+          <p:cNvPr id="369" name="Text 18"/>
           <p:cNvSpPr/>
           <p:nvPr/>
         </p:nvSpPr>
@@ -31420,7 +31587,7 @@
       </p:grpSpPr>
       <p:sp>
         <p:nvSpPr>
-          <p:cNvPr id="369" name="Text 0"/>
+          <p:cNvPr id="370" name="Text 0"/>
           <p:cNvSpPr/>
           <p:nvPr/>
         </p:nvSpPr>
@@ -31481,7 +31648,7 @@
       </p:sp>
       <p:sp>
         <p:nvSpPr>
-          <p:cNvPr id="370" name="Shape 1"/>
+          <p:cNvPr id="371" name="Shape 1"/>
           <p:cNvSpPr/>
           <p:nvPr/>
         </p:nvSpPr>
@@ -31526,7 +31693,7 @@
       </p:sp>
       <p:sp>
         <p:nvSpPr>
-          <p:cNvPr id="371" name="Text 2"/>
+          <p:cNvPr id="372" name="Text 2"/>
           <p:cNvSpPr/>
           <p:nvPr/>
         </p:nvSpPr>
@@ -31587,7 +31754,7 @@
       </p:sp>
       <p:sp>
         <p:nvSpPr>
-          <p:cNvPr id="372" name="Text 3"/>
+          <p:cNvPr id="373" name="Text 3"/>
           <p:cNvSpPr/>
           <p:nvPr/>
         </p:nvSpPr>
@@ -31648,7 +31815,7 @@
       </p:sp>
       <p:sp>
         <p:nvSpPr>
-          <p:cNvPr id="373" name="Text 4"/>
+          <p:cNvPr id="374" name="Text 4"/>
           <p:cNvSpPr/>
           <p:nvPr/>
         </p:nvSpPr>
@@ -31709,7 +31876,7 @@
       </p:sp>
       <p:sp>
         <p:nvSpPr>
-          <p:cNvPr id="374" name="Shape 5"/>
+          <p:cNvPr id="375" name="Shape 5"/>
           <p:cNvSpPr/>
           <p:nvPr/>
         </p:nvSpPr>
@@ -31754,7 +31921,7 @@
       </p:sp>
       <p:sp>
         <p:nvSpPr>
-          <p:cNvPr id="375" name="Text 6"/>
+          <p:cNvPr id="376" name="Text 6"/>
           <p:cNvSpPr/>
           <p:nvPr/>
         </p:nvSpPr>
@@ -31815,7 +31982,7 @@
       </p:sp>
       <p:sp>
         <p:nvSpPr>
-          <p:cNvPr id="376" name="Text 7"/>
+          <p:cNvPr id="377" name="Text 7"/>
           <p:cNvSpPr/>
           <p:nvPr/>
         </p:nvSpPr>
@@ -31876,7 +32043,7 @@
       </p:sp>
       <p:sp>
         <p:nvSpPr>
-          <p:cNvPr id="377" name="Text 8"/>
+          <p:cNvPr id="378" name="Text 8"/>
           <p:cNvSpPr/>
           <p:nvPr/>
         </p:nvSpPr>
@@ -31937,7 +32104,7 @@
       </p:sp>
       <p:sp>
         <p:nvSpPr>
-          <p:cNvPr id="378" name="Shape 9"/>
+          <p:cNvPr id="379" name="Shape 9"/>
           <p:cNvSpPr/>
           <p:nvPr/>
         </p:nvSpPr>
@@ -31982,7 +32149,7 @@
       </p:sp>
       <p:sp>
         <p:nvSpPr>
-          <p:cNvPr id="379" name="Text 10"/>
+          <p:cNvPr id="380" name="Text 10"/>
           <p:cNvSpPr/>
           <p:nvPr/>
         </p:nvSpPr>
@@ -32043,7 +32210,7 @@
       </p:sp>
       <p:sp>
         <p:nvSpPr>
-          <p:cNvPr id="380" name="Text 11"/>
+          <p:cNvPr id="381" name="Text 11"/>
           <p:cNvSpPr/>
           <p:nvPr/>
         </p:nvSpPr>
@@ -32104,7 +32271,7 @@
       </p:sp>
       <p:sp>
         <p:nvSpPr>
-          <p:cNvPr id="381" name="Text 12"/>
+          <p:cNvPr id="382" name="Text 12"/>
           <p:cNvSpPr/>
           <p:nvPr/>
         </p:nvSpPr>
@@ -32165,7 +32332,7 @@
       </p:sp>
       <p:sp>
         <p:nvSpPr>
-          <p:cNvPr id="382" name="Shape 13"/>
+          <p:cNvPr id="383" name="Shape 13"/>
           <p:cNvSpPr/>
           <p:nvPr/>
         </p:nvSpPr>
@@ -32210,7 +32377,7 @@
       </p:sp>
       <p:sp>
         <p:nvSpPr>
-          <p:cNvPr id="383" name="Text 14"/>
+          <p:cNvPr id="384" name="Text 14"/>
           <p:cNvSpPr/>
           <p:nvPr/>
         </p:nvSpPr>
@@ -32271,7 +32438,7 @@
       </p:sp>
       <p:sp>
         <p:nvSpPr>
-          <p:cNvPr id="384" name="Text 15"/>
+          <p:cNvPr id="385" name="Text 15"/>
           <p:cNvSpPr/>
           <p:nvPr/>
         </p:nvSpPr>
@@ -32332,7 +32499,7 @@
       </p:sp>
       <p:sp>
         <p:nvSpPr>
-          <p:cNvPr id="385" name="Text 16"/>
+          <p:cNvPr id="386" name="Text 16"/>
           <p:cNvSpPr/>
           <p:nvPr/>
         </p:nvSpPr>
@@ -32393,7 +32560,7 @@
       </p:sp>
       <p:sp>
         <p:nvSpPr>
-          <p:cNvPr id="386" name="Shape 17"/>
+          <p:cNvPr id="387" name="Shape 17"/>
           <p:cNvSpPr/>
           <p:nvPr/>
         </p:nvSpPr>
@@ -32441,7 +32608,7 @@
       </p:sp>
       <p:sp>
         <p:nvSpPr>
-          <p:cNvPr id="387" name="Text 18"/>
+          <p:cNvPr id="388" name="Text 18"/>
           <p:cNvSpPr/>
           <p:nvPr/>
         </p:nvSpPr>
@@ -32502,7 +32669,7 @@
       </p:sp>
       <p:sp>
         <p:nvSpPr>
-          <p:cNvPr id="388" name="Text 19"/>
+          <p:cNvPr id="389" name="Text 19"/>
           <p:cNvSpPr/>
           <p:nvPr/>
         </p:nvSpPr>
@@ -32563,7 +32730,7 @@
       </p:sp>
       <p:sp>
         <p:nvSpPr>
-          <p:cNvPr id="389" name="Text 20"/>
+          <p:cNvPr id="390" name="Text 20"/>
           <p:cNvSpPr/>
           <p:nvPr/>
         </p:nvSpPr>
@@ -32654,7 +32821,7 @@
       </p:grpSpPr>
       <p:sp>
         <p:nvSpPr>
-          <p:cNvPr id="390" name="Text 0"/>
+          <p:cNvPr id="391" name="Text 0"/>
           <p:cNvSpPr/>
           <p:nvPr/>
         </p:nvSpPr>
@@ -32715,7 +32882,7 @@
       </p:sp>
       <p:sp>
         <p:nvSpPr>
-          <p:cNvPr id="391" name="Shape 1"/>
+          <p:cNvPr id="392" name="Shape 1"/>
           <p:cNvSpPr/>
           <p:nvPr/>
         </p:nvSpPr>
@@ -32760,7 +32927,7 @@
       </p:sp>
       <p:sp>
         <p:nvSpPr>
-          <p:cNvPr id="392" name="Text 2"/>
+          <p:cNvPr id="393" name="Text 2"/>
           <p:cNvSpPr/>
           <p:nvPr/>
         </p:nvSpPr>
@@ -32821,7 +32988,7 @@
       </p:sp>
       <p:sp>
         <p:nvSpPr>
-          <p:cNvPr id="393" name="Text 3"/>
+          <p:cNvPr id="394" name="Text 3"/>
           <p:cNvSpPr/>
           <p:nvPr/>
         </p:nvSpPr>
@@ -32882,7 +33049,7 @@
       </p:sp>
       <p:sp>
         <p:nvSpPr>
-          <p:cNvPr id="394" name="Shape 4"/>
+          <p:cNvPr id="395" name="Shape 4"/>
           <p:cNvSpPr/>
           <p:nvPr/>
         </p:nvSpPr>
@@ -32927,7 +33094,7 @@
       </p:sp>
       <p:sp>
         <p:nvSpPr>
-          <p:cNvPr id="395" name="Text 5"/>
+          <p:cNvPr id="396" name="Text 5"/>
           <p:cNvSpPr/>
           <p:nvPr/>
         </p:nvSpPr>
@@ -32988,7 +33155,7 @@
       </p:sp>
       <p:sp>
         <p:nvSpPr>
-          <p:cNvPr id="396" name="Text 6"/>
+          <p:cNvPr id="397" name="Text 6"/>
           <p:cNvSpPr/>
           <p:nvPr/>
         </p:nvSpPr>
@@ -33049,7 +33216,7 @@
       </p:sp>
       <p:sp>
         <p:nvSpPr>
-          <p:cNvPr id="397" name="Shape 7"/>
+          <p:cNvPr id="398" name="Shape 7"/>
           <p:cNvSpPr/>
           <p:nvPr/>
         </p:nvSpPr>
@@ -33094,7 +33261,7 @@
       </p:sp>
       <p:sp>
         <p:nvSpPr>
-          <p:cNvPr id="398" name="Text 8"/>
+          <p:cNvPr id="399" name="Text 8"/>
           <p:cNvSpPr/>
           <p:nvPr/>
         </p:nvSpPr>
@@ -33155,7 +33322,7 @@
       </p:sp>
       <p:sp>
         <p:nvSpPr>
-          <p:cNvPr id="399" name="Text 9"/>
+          <p:cNvPr id="400" name="Text 9"/>
           <p:cNvSpPr/>
           <p:nvPr/>
         </p:nvSpPr>
@@ -33216,7 +33383,7 @@
       </p:sp>
       <p:sp>
         <p:nvSpPr>
-          <p:cNvPr id="400" name="Shape 10"/>
+          <p:cNvPr id="401" name="Shape 10"/>
           <p:cNvSpPr/>
           <p:nvPr/>
         </p:nvSpPr>
@@ -33261,7 +33428,7 @@
       </p:sp>
       <p:sp>
         <p:nvSpPr>
-          <p:cNvPr id="401" name="Text 11"/>
+          <p:cNvPr id="402" name="Text 11"/>
           <p:cNvSpPr/>
           <p:nvPr/>
         </p:nvSpPr>
@@ -33322,7 +33489,7 @@
       </p:sp>
       <p:sp>
         <p:nvSpPr>
-          <p:cNvPr id="402" name="Text 12"/>
+          <p:cNvPr id="403" name="Text 12"/>
           <p:cNvSpPr/>
           <p:nvPr/>
         </p:nvSpPr>
@@ -33383,7 +33550,7 @@
       </p:sp>
       <p:sp>
         <p:nvSpPr>
-          <p:cNvPr id="403" name="Shape 13"/>
+          <p:cNvPr id="404" name="Shape 13"/>
           <p:cNvSpPr/>
           <p:nvPr/>
         </p:nvSpPr>
@@ -33431,7 +33598,7 @@
       </p:sp>
       <p:sp>
         <p:nvSpPr>
-          <p:cNvPr id="404" name="Text 14"/>
+          <p:cNvPr id="405" name="Text 14"/>
           <p:cNvSpPr/>
           <p:nvPr/>
         </p:nvSpPr>
@@ -33504,7 +33671,7 @@
       </p:sp>
       <p:sp>
         <p:nvSpPr>
-          <p:cNvPr id="405" name="Text 15"/>
+          <p:cNvPr id="406" name="Text 15"/>
           <p:cNvSpPr/>
           <p:nvPr/>
         </p:nvSpPr>
@@ -33565,7 +33732,7 @@
       </p:sp>
       <p:sp>
         <p:nvSpPr>
-          <p:cNvPr id="406" name="Text 16"/>
+          <p:cNvPr id="407" name="Text 16"/>
           <p:cNvSpPr/>
           <p:nvPr/>
         </p:nvSpPr>
@@ -33626,7 +33793,7 @@
       </p:sp>
       <p:sp>
         <p:nvSpPr>
-          <p:cNvPr id="407" name="Text 17"/>
+          <p:cNvPr id="408" name="Text 17"/>
           <p:cNvSpPr/>
           <p:nvPr/>
         </p:nvSpPr>
